--- a/第6章-面向对象程序设计/第6章-面向对象程序设计.pptx
+++ b/第6章-面向对象程序设计/第6章-面向对象程序设计.pptx
@@ -451,1737 +451,58 @@
 </p:cmAuthorLst>
 </file>
 
-<file path=ppt/revisionInfo.xml><?xml version="1.0" encoding="utf-8"?>
-<p1510:revInfo xmlns:a="http://schemas.openxmlformats.org/drawingml/2006/main" xmlns:r="http://schemas.openxmlformats.org/officeDocument/2006/relationships" xmlns:p1510="http://schemas.microsoft.com/office/powerpoint/2015/10/main">
-  <p1510:revLst>
-    <p1510:client id="{1FEF9892-859B-8349-A234-8660AFCBAD3E}" v="79" dt="2025-06-02T14:40:11.009"/>
-  </p1510:revLst>
-</p1510:revInfo>
-</file>
-
 <file path=ppt/changesInfos/changesInfo1.xml><?xml version="1.0" encoding="utf-8"?>
 <pc:chgInfo xmlns:a="http://schemas.openxmlformats.org/drawingml/2006/main" xmlns:r="http://schemas.openxmlformats.org/officeDocument/2006/relationships" xmlns:ac="http://schemas.microsoft.com/office/drawing/2013/main/command" xmlns:pc="http://schemas.microsoft.com/office/powerpoint/2013/main/command">
   <pc:docChgLst>
-    <pc:chgData name="Xin Luo" userId="82312ee5779919a4" providerId="LiveId" clId="{2800F99A-8A54-2B47-A823-B15E42F1D981}"/>
-    <pc:docChg chg="custSel delSld modSld">
-      <pc:chgData name="Xin Luo" userId="82312ee5779919a4" providerId="LiveId" clId="{2800F99A-8A54-2B47-A823-B15E42F1D981}" dt="2025-05-08T15:37:54.066" v="192" actId="20577"/>
+    <pc:chgData name="Xin Luo" userId="82312ee5779919a4" providerId="LiveId" clId="{4B16E866-FFF1-585A-8670-68209B92BFC1}"/>
+    <pc:docChg chg="undo custSel modSld">
+      <pc:chgData name="Xin Luo" userId="82312ee5779919a4" providerId="LiveId" clId="{4B16E866-FFF1-585A-8670-68209B92BFC1}" dt="2026-08-27T06:51:18.888" v="75" actId="20577"/>
       <pc:docMkLst>
         <pc:docMk/>
       </pc:docMkLst>
-      <pc:sldChg chg="delSp modSp mod">
-        <pc:chgData name="Xin Luo" userId="82312ee5779919a4" providerId="LiveId" clId="{2800F99A-8A54-2B47-A823-B15E42F1D981}" dt="2025-05-08T15:36:56.172" v="86" actId="1035"/>
+      <pc:sldChg chg="modSp mod">
+        <pc:chgData name="Xin Luo" userId="82312ee5779919a4" providerId="LiveId" clId="{4B16E866-FFF1-585A-8670-68209B92BFC1}" dt="2026-08-27T06:42:08.630" v="13" actId="20577"/>
         <pc:sldMkLst>
           <pc:docMk/>
-          <pc:sldMk cId="1576120367" sldId="2387"/>
+          <pc:sldMk cId="4207004688" sldId="2741"/>
         </pc:sldMkLst>
         <pc:spChg chg="mod">
-          <ac:chgData name="Xin Luo" userId="82312ee5779919a4" providerId="LiveId" clId="{2800F99A-8A54-2B47-A823-B15E42F1D981}" dt="2025-05-08T15:36:45.371" v="48" actId="20577"/>
+          <ac:chgData name="Xin Luo" userId="82312ee5779919a4" providerId="LiveId" clId="{4B16E866-FFF1-585A-8670-68209B92BFC1}" dt="2026-08-27T06:42:08.630" v="13" actId="20577"/>
           <ac:spMkLst>
             <pc:docMk/>
-            <pc:sldMk cId="1576120367" sldId="2387"/>
-            <ac:spMk id="14" creationId="{00000000-0000-0000-0000-000000000000}"/>
+            <pc:sldMk cId="4207004688" sldId="2741"/>
+            <ac:spMk id="4" creationId="{DBE2EB52-1153-547D-4DDB-F105FCA1059C}"/>
           </ac:spMkLst>
         </pc:spChg>
-        <pc:grpChg chg="mod">
-          <ac:chgData name="Xin Luo" userId="82312ee5779919a4" providerId="LiveId" clId="{2800F99A-8A54-2B47-A823-B15E42F1D981}" dt="2025-05-08T15:36:56.172" v="86" actId="1035"/>
-          <ac:grpSpMkLst>
-            <pc:docMk/>
-            <pc:sldMk cId="1576120367" sldId="2387"/>
-            <ac:grpSpMk id="3" creationId="{12ED16A1-79B8-7DB1-1CC1-250B051BAD58}"/>
-          </ac:grpSpMkLst>
-        </pc:grpChg>
-      </pc:sldChg>
-      <pc:sldChg chg="modSp mod">
-        <pc:chgData name="Xin Luo" userId="82312ee5779919a4" providerId="LiveId" clId="{2800F99A-8A54-2B47-A823-B15E42F1D981}" dt="2025-05-08T15:37:14.888" v="125" actId="20577"/>
-        <pc:sldMkLst>
-          <pc:docMk/>
-          <pc:sldMk cId="2415901206" sldId="2447"/>
-        </pc:sldMkLst>
         <pc:spChg chg="mod">
-          <ac:chgData name="Xin Luo" userId="82312ee5779919a4" providerId="LiveId" clId="{2800F99A-8A54-2B47-A823-B15E42F1D981}" dt="2025-05-08T15:37:14.888" v="125" actId="20577"/>
+          <ac:chgData name="Xin Luo" userId="82312ee5779919a4" providerId="LiveId" clId="{4B16E866-FFF1-585A-8670-68209B92BFC1}" dt="2026-08-27T06:42:04.655" v="11" actId="20577"/>
           <ac:spMkLst>
             <pc:docMk/>
-            <pc:sldMk cId="2415901206" sldId="2447"/>
-            <ac:spMk id="7" creationId="{00000000-0000-0000-0000-000000000000}"/>
+            <pc:sldMk cId="4207004688" sldId="2741"/>
+            <ac:spMk id="6" creationId="{68615743-0F76-1E7B-8513-381292D6BC62}"/>
           </ac:spMkLst>
         </pc:spChg>
       </pc:sldChg>
       <pc:sldChg chg="modSp mod">
-        <pc:chgData name="Xin Luo" userId="82312ee5779919a4" providerId="LiveId" clId="{2800F99A-8A54-2B47-A823-B15E42F1D981}" dt="2025-05-08T15:37:54.066" v="192" actId="20577"/>
+        <pc:chgData name="Xin Luo" userId="82312ee5779919a4" providerId="LiveId" clId="{4B16E866-FFF1-585A-8670-68209B92BFC1}" dt="2026-08-27T06:51:18.888" v="75" actId="20577"/>
         <pc:sldMkLst>
           <pc:docMk/>
-          <pc:sldMk cId="481122590" sldId="2709"/>
-        </pc:sldMkLst>
-      </pc:sldChg>
-      <pc:sldChg chg="del">
-        <pc:chgData name="Xin Luo" userId="82312ee5779919a4" providerId="LiveId" clId="{2800F99A-8A54-2B47-A823-B15E42F1D981}" dt="2025-05-08T15:37:45.289" v="168" actId="2696"/>
-        <pc:sldMkLst>
-          <pc:docMk/>
-          <pc:sldMk cId="972163772" sldId="2720"/>
-        </pc:sldMkLst>
-      </pc:sldChg>
-      <pc:sldChg chg="delSp modSp mod">
-        <pc:chgData name="Xin Luo" userId="82312ee5779919a4" providerId="LiveId" clId="{2800F99A-8A54-2B47-A823-B15E42F1D981}" dt="2025-05-08T15:37:38.667" v="164" actId="20577"/>
-        <pc:sldMkLst>
-          <pc:docMk/>
-          <pc:sldMk cId="3053350483" sldId="2729"/>
+          <pc:sldMk cId="2896619728" sldId="2792"/>
         </pc:sldMkLst>
         <pc:spChg chg="mod">
-          <ac:chgData name="Xin Luo" userId="82312ee5779919a4" providerId="LiveId" clId="{2800F99A-8A54-2B47-A823-B15E42F1D981}" dt="2025-05-08T15:37:27.788" v="128" actId="20577"/>
+          <ac:chgData name="Xin Luo" userId="82312ee5779919a4" providerId="LiveId" clId="{4B16E866-FFF1-585A-8670-68209B92BFC1}" dt="2026-08-27T06:42:38.615" v="30" actId="108"/>
           <ac:spMkLst>
             <pc:docMk/>
-            <pc:sldMk cId="3053350483" sldId="2729"/>
-            <ac:spMk id="2" creationId="{631AADB6-C88A-D817-4683-FC087E4E240F}"/>
+            <pc:sldMk cId="2896619728" sldId="2792"/>
+            <ac:spMk id="4" creationId="{0460D51F-5FF0-8DAA-3264-66FADD204E85}"/>
           </ac:spMkLst>
         </pc:spChg>
         <pc:spChg chg="mod">
-          <ac:chgData name="Xin Luo" userId="82312ee5779919a4" providerId="LiveId" clId="{2800F99A-8A54-2B47-A823-B15E42F1D981}" dt="2025-05-08T15:37:38.667" v="164" actId="20577"/>
+          <ac:chgData name="Xin Luo" userId="82312ee5779919a4" providerId="LiveId" clId="{4B16E866-FFF1-585A-8670-68209B92BFC1}" dt="2026-08-27T06:51:18.888" v="75" actId="20577"/>
           <ac:spMkLst>
             <pc:docMk/>
-            <pc:sldMk cId="3053350483" sldId="2729"/>
-            <ac:spMk id="3" creationId="{00000000-0000-0000-0000-000000000000}"/>
-          </ac:spMkLst>
-        </pc:spChg>
-      </pc:sldChg>
-      <pc:sldChg chg="del">
-        <pc:chgData name="Xin Luo" userId="82312ee5779919a4" providerId="LiveId" clId="{2800F99A-8A54-2B47-A823-B15E42F1D981}" dt="2025-05-08T15:37:43.655" v="166" actId="2696"/>
-        <pc:sldMkLst>
-          <pc:docMk/>
-          <pc:sldMk cId="1201927867" sldId="2730"/>
-        </pc:sldMkLst>
-      </pc:sldChg>
-      <pc:sldChg chg="del">
-        <pc:chgData name="Xin Luo" userId="82312ee5779919a4" providerId="LiveId" clId="{2800F99A-8A54-2B47-A823-B15E42F1D981}" dt="2025-05-08T15:37:43.651" v="165" actId="2696"/>
-        <pc:sldMkLst>
-          <pc:docMk/>
-          <pc:sldMk cId="3947651410" sldId="2767"/>
-        </pc:sldMkLst>
-      </pc:sldChg>
-      <pc:sldChg chg="del">
-        <pc:chgData name="Xin Luo" userId="82312ee5779919a4" providerId="LiveId" clId="{2800F99A-8A54-2B47-A823-B15E42F1D981}" dt="2025-05-08T15:37:43.656" v="167" actId="2696"/>
-        <pc:sldMkLst>
-          <pc:docMk/>
-          <pc:sldMk cId="4149704501" sldId="2768"/>
-        </pc:sldMkLst>
-      </pc:sldChg>
-    </pc:docChg>
-  </pc:docChgLst>
-  <pc:docChgLst>
-    <pc:chgData name="Xin Luo" userId="82312ee5779919a4" providerId="LiveId" clId="{65A98D7F-B1DF-E542-A17B-8F6E9ADA57A5}"/>
-    <pc:docChg chg="undo custSel addSld delSld modSld sldOrd">
-      <pc:chgData name="Xin Luo" userId="82312ee5779919a4" providerId="LiveId" clId="{65A98D7F-B1DF-E542-A17B-8F6E9ADA57A5}" dt="2025-05-26T13:26:21.221" v="1148" actId="20577"/>
-      <pc:docMkLst>
-        <pc:docMk/>
-      </pc:docMkLst>
-      <pc:sldChg chg="addSp delSp modSp mod ord">
-        <pc:chgData name="Xin Luo" userId="82312ee5779919a4" providerId="LiveId" clId="{65A98D7F-B1DF-E542-A17B-8F6E9ADA57A5}" dt="2025-05-26T10:01:26.562" v="130" actId="1036"/>
-        <pc:sldMkLst>
-          <pc:docMk/>
-          <pc:sldMk cId="2783263808" sldId="2766"/>
-        </pc:sldMkLst>
-        <pc:spChg chg="add mod">
-          <ac:chgData name="Xin Luo" userId="82312ee5779919a4" providerId="LiveId" clId="{65A98D7F-B1DF-E542-A17B-8F6E9ADA57A5}" dt="2025-05-26T09:54:45.003" v="1"/>
-          <ac:spMkLst>
-            <pc:docMk/>
-            <pc:sldMk cId="2783263808" sldId="2766"/>
-            <ac:spMk id="4" creationId="{FFCC6193-3D91-666C-938B-B94F4F5B21CA}"/>
-          </ac:spMkLst>
-        </pc:spChg>
-        <pc:spChg chg="mod">
-          <ac:chgData name="Xin Luo" userId="82312ee5779919a4" providerId="LiveId" clId="{65A98D7F-B1DF-E542-A17B-8F6E9ADA57A5}" dt="2025-05-26T10:01:26.562" v="130" actId="1036"/>
-          <ac:spMkLst>
-            <pc:docMk/>
-            <pc:sldMk cId="2783263808" sldId="2766"/>
-            <ac:spMk id="17" creationId="{9E05FFCA-3371-AF5C-381D-71D984055F5A}"/>
-          </ac:spMkLst>
-        </pc:spChg>
-        <pc:picChg chg="mod">
-          <ac:chgData name="Xin Luo" userId="82312ee5779919a4" providerId="LiveId" clId="{65A98D7F-B1DF-E542-A17B-8F6E9ADA57A5}" dt="2025-05-26T10:01:23.288" v="126" actId="1076"/>
-          <ac:picMkLst>
-            <pc:docMk/>
-            <pc:sldMk cId="2783263808" sldId="2766"/>
-            <ac:picMk id="6" creationId="{A7BAF3A2-2FEC-0A6B-1CBB-4CBFECAC587D}"/>
-          </ac:picMkLst>
-        </pc:picChg>
-      </pc:sldChg>
-      <pc:sldChg chg="addSp delSp modSp mod">
-        <pc:chgData name="Xin Luo" userId="82312ee5779919a4" providerId="LiveId" clId="{65A98D7F-B1DF-E542-A17B-8F6E9ADA57A5}" dt="2025-05-26T11:46:31.412" v="371" actId="20577"/>
-        <pc:sldMkLst>
-          <pc:docMk/>
-          <pc:sldMk cId="237633983" sldId="2771"/>
-        </pc:sldMkLst>
-        <pc:spChg chg="mod">
-          <ac:chgData name="Xin Luo" userId="82312ee5779919a4" providerId="LiveId" clId="{65A98D7F-B1DF-E542-A17B-8F6E9ADA57A5}" dt="2025-05-26T11:45:24.194" v="345" actId="1076"/>
-          <ac:spMkLst>
-            <pc:docMk/>
-            <pc:sldMk cId="237633983" sldId="2771"/>
-            <ac:spMk id="2" creationId="{631AADB6-C88A-D817-4683-FC087E4E240F}"/>
-          </ac:spMkLst>
-        </pc:spChg>
-        <pc:spChg chg="add mod">
-          <ac:chgData name="Xin Luo" userId="82312ee5779919a4" providerId="LiveId" clId="{65A98D7F-B1DF-E542-A17B-8F6E9ADA57A5}" dt="2025-05-26T11:46:31.412" v="371" actId="20577"/>
-          <ac:spMkLst>
-            <pc:docMk/>
-            <pc:sldMk cId="237633983" sldId="2771"/>
-            <ac:spMk id="21" creationId="{7C734150-3122-D07B-79A7-00F1EEA5232B}"/>
-          </ac:spMkLst>
-        </pc:spChg>
-      </pc:sldChg>
-      <pc:sldChg chg="modSp mod">
-        <pc:chgData name="Xin Luo" userId="82312ee5779919a4" providerId="LiveId" clId="{65A98D7F-B1DF-E542-A17B-8F6E9ADA57A5}" dt="2025-05-26T10:00:04.971" v="99" actId="20577"/>
-        <pc:sldMkLst>
-          <pc:docMk/>
-          <pc:sldMk cId="3114578072" sldId="2775"/>
-        </pc:sldMkLst>
-        <pc:graphicFrameChg chg="mod modGraphic">
-          <ac:chgData name="Xin Luo" userId="82312ee5779919a4" providerId="LiveId" clId="{65A98D7F-B1DF-E542-A17B-8F6E9ADA57A5}" dt="2025-05-26T10:00:04.971" v="99" actId="20577"/>
-          <ac:graphicFrameMkLst>
-            <pc:docMk/>
-            <pc:sldMk cId="3114578072" sldId="2775"/>
-            <ac:graphicFrameMk id="4" creationId="{E69B2228-5D11-D4FF-2302-99CC0F85F7E2}"/>
-          </ac:graphicFrameMkLst>
-        </pc:graphicFrameChg>
-      </pc:sldChg>
-      <pc:sldChg chg="addSp delSp modSp add mod">
-        <pc:chgData name="Xin Luo" userId="82312ee5779919a4" providerId="LiveId" clId="{65A98D7F-B1DF-E542-A17B-8F6E9ADA57A5}" dt="2025-05-26T12:00:53.403" v="524" actId="1035"/>
-        <pc:sldMkLst>
-          <pc:docMk/>
-          <pc:sldMk cId="609575857" sldId="2776"/>
-        </pc:sldMkLst>
-        <pc:spChg chg="mod">
-          <ac:chgData name="Xin Luo" userId="82312ee5779919a4" providerId="LiveId" clId="{65A98D7F-B1DF-E542-A17B-8F6E9ADA57A5}" dt="2025-05-26T11:59:02.540" v="466" actId="21"/>
-          <ac:spMkLst>
-            <pc:docMk/>
-            <pc:sldMk cId="609575857" sldId="2776"/>
-            <ac:spMk id="17" creationId="{D41186E3-6A42-7E88-A23F-786D5085803C}"/>
-          </ac:spMkLst>
-        </pc:spChg>
-      </pc:sldChg>
-      <pc:sldChg chg="addSp delSp modSp add mod ord">
-        <pc:chgData name="Xin Luo" userId="82312ee5779919a4" providerId="LiveId" clId="{65A98D7F-B1DF-E542-A17B-8F6E9ADA57A5}" dt="2025-05-26T11:50:11.094" v="407" actId="1035"/>
-        <pc:sldMkLst>
-          <pc:docMk/>
-          <pc:sldMk cId="1038133134" sldId="2777"/>
-        </pc:sldMkLst>
-        <pc:spChg chg="mod">
-          <ac:chgData name="Xin Luo" userId="82312ee5779919a4" providerId="LiveId" clId="{65A98D7F-B1DF-E542-A17B-8F6E9ADA57A5}" dt="2025-05-26T11:50:04.197" v="400" actId="1076"/>
-          <ac:spMkLst>
-            <pc:docMk/>
-            <pc:sldMk cId="1038133134" sldId="2777"/>
-            <ac:spMk id="17" creationId="{CA05FC91-2DA4-DD1A-6230-4FAF60DFA3C3}"/>
-          </ac:spMkLst>
-        </pc:spChg>
-        <pc:graphicFrameChg chg="add mod modGraphic">
-          <ac:chgData name="Xin Luo" userId="82312ee5779919a4" providerId="LiveId" clId="{65A98D7F-B1DF-E542-A17B-8F6E9ADA57A5}" dt="2025-05-26T11:50:11.094" v="407" actId="1035"/>
-          <ac:graphicFrameMkLst>
-            <pc:docMk/>
-            <pc:sldMk cId="1038133134" sldId="2777"/>
-            <ac:graphicFrameMk id="6" creationId="{8DF97DF8-2D7B-80A9-CF56-423078363C1A}"/>
-          </ac:graphicFrameMkLst>
-        </pc:graphicFrameChg>
-      </pc:sldChg>
-      <pc:sldChg chg="addSp delSp modSp new del mod">
-        <pc:chgData name="Xin Luo" userId="82312ee5779919a4" providerId="LiveId" clId="{65A98D7F-B1DF-E542-A17B-8F6E9ADA57A5}" dt="2025-05-26T10:32:52.082" v="201" actId="2696"/>
-        <pc:sldMkLst>
-          <pc:docMk/>
-          <pc:sldMk cId="3627438183" sldId="2777"/>
-        </pc:sldMkLst>
-      </pc:sldChg>
-      <pc:sldChg chg="addSp delSp modSp add mod">
-        <pc:chgData name="Xin Luo" userId="82312ee5779919a4" providerId="LiveId" clId="{65A98D7F-B1DF-E542-A17B-8F6E9ADA57A5}" dt="2025-05-26T12:45:58.563" v="905"/>
-        <pc:sldMkLst>
-          <pc:docMk/>
-          <pc:sldMk cId="565877602" sldId="2778"/>
-        </pc:sldMkLst>
-        <pc:spChg chg="mod">
-          <ac:chgData name="Xin Luo" userId="82312ee5779919a4" providerId="LiveId" clId="{65A98D7F-B1DF-E542-A17B-8F6E9ADA57A5}" dt="2025-05-26T11:52:13.320" v="419" actId="20577"/>
-          <ac:spMkLst>
-            <pc:docMk/>
-            <pc:sldMk cId="565877602" sldId="2778"/>
-            <ac:spMk id="2" creationId="{5A6FA074-C6BA-24B3-7F7D-34CFDE893EF7}"/>
-          </ac:spMkLst>
-        </pc:spChg>
-        <pc:spChg chg="mod">
-          <ac:chgData name="Xin Luo" userId="82312ee5779919a4" providerId="LiveId" clId="{65A98D7F-B1DF-E542-A17B-8F6E9ADA57A5}" dt="2025-05-26T12:43:06.332" v="894" actId="2711"/>
-          <ac:spMkLst>
-            <pc:docMk/>
-            <pc:sldMk cId="565877602" sldId="2778"/>
-            <ac:spMk id="17" creationId="{B5DE59D0-AAFE-2780-CAA5-DEC512116523}"/>
-          </ac:spMkLst>
-        </pc:spChg>
-      </pc:sldChg>
-      <pc:sldChg chg="addSp delSp modSp add mod">
-        <pc:chgData name="Xin Luo" userId="82312ee5779919a4" providerId="LiveId" clId="{65A98D7F-B1DF-E542-A17B-8F6E9ADA57A5}" dt="2025-05-26T13:26:21.221" v="1148" actId="20577"/>
-        <pc:sldMkLst>
-          <pc:docMk/>
-          <pc:sldMk cId="1437556396" sldId="2779"/>
-        </pc:sldMkLst>
-        <pc:spChg chg="mod">
-          <ac:chgData name="Xin Luo" userId="82312ee5779919a4" providerId="LiveId" clId="{65A98D7F-B1DF-E542-A17B-8F6E9ADA57A5}" dt="2025-05-26T11:52:29.671" v="434" actId="20577"/>
-          <ac:spMkLst>
-            <pc:docMk/>
-            <pc:sldMk cId="1437556396" sldId="2779"/>
-            <ac:spMk id="2" creationId="{DFECF98A-FDB2-6924-2201-3ACC5433852C}"/>
-          </ac:spMkLst>
-        </pc:spChg>
-        <pc:spChg chg="add mod">
-          <ac:chgData name="Xin Luo" userId="82312ee5779919a4" providerId="LiveId" clId="{65A98D7F-B1DF-E542-A17B-8F6E9ADA57A5}" dt="2025-05-26T13:24:45.838" v="1132" actId="1076"/>
-          <ac:spMkLst>
-            <pc:docMk/>
-            <pc:sldMk cId="1437556396" sldId="2779"/>
-            <ac:spMk id="11" creationId="{DF4F3646-F9A6-FC11-64F9-561D1222DDBD}"/>
-          </ac:spMkLst>
-        </pc:spChg>
-      </pc:sldChg>
-      <pc:sldChg chg="modSp add mod">
-        <pc:chgData name="Xin Luo" userId="82312ee5779919a4" providerId="LiveId" clId="{65A98D7F-B1DF-E542-A17B-8F6E9ADA57A5}" dt="2025-05-26T12:05:01.988" v="568" actId="20577"/>
-        <pc:sldMkLst>
-          <pc:docMk/>
-          <pc:sldMk cId="887088617" sldId="2780"/>
-        </pc:sldMkLst>
-        <pc:spChg chg="mod">
-          <ac:chgData name="Xin Luo" userId="82312ee5779919a4" providerId="LiveId" clId="{65A98D7F-B1DF-E542-A17B-8F6E9ADA57A5}" dt="2025-05-26T12:05:01.988" v="568" actId="20577"/>
-          <ac:spMkLst>
-            <pc:docMk/>
-            <pc:sldMk cId="887088617" sldId="2780"/>
-            <ac:spMk id="17" creationId="{38B6BC14-43CC-3EA9-4A3D-6D97F4686FA1}"/>
-          </ac:spMkLst>
-        </pc:spChg>
-      </pc:sldChg>
-      <pc:sldChg chg="addSp delSp modSp add mod">
-        <pc:chgData name="Xin Luo" userId="82312ee5779919a4" providerId="LiveId" clId="{65A98D7F-B1DF-E542-A17B-8F6E9ADA57A5}" dt="2025-05-26T12:12:12.015" v="691" actId="1076"/>
-        <pc:sldMkLst>
-          <pc:docMk/>
-          <pc:sldMk cId="1421971610" sldId="2781"/>
-        </pc:sldMkLst>
-        <pc:spChg chg="mod">
-          <ac:chgData name="Xin Luo" userId="82312ee5779919a4" providerId="LiveId" clId="{65A98D7F-B1DF-E542-A17B-8F6E9ADA57A5}" dt="2025-05-26T12:10:15.005" v="628" actId="1035"/>
-          <ac:spMkLst>
-            <pc:docMk/>
-            <pc:sldMk cId="1421971610" sldId="2781"/>
-            <ac:spMk id="17" creationId="{338A361A-6523-524F-BE7C-A36079E8C65B}"/>
-          </ac:spMkLst>
-        </pc:spChg>
-        <pc:spChg chg="add mod">
-          <ac:chgData name="Xin Luo" userId="82312ee5779919a4" providerId="LiveId" clId="{65A98D7F-B1DF-E542-A17B-8F6E9ADA57A5}" dt="2025-05-26T12:11:52.708" v="685" actId="1076"/>
-          <ac:spMkLst>
-            <pc:docMk/>
-            <pc:sldMk cId="1421971610" sldId="2781"/>
-            <ac:spMk id="18" creationId="{68DC9956-6C26-2EB6-BD0C-5483B6425CE1}"/>
-          </ac:spMkLst>
-        </pc:spChg>
-      </pc:sldChg>
-      <pc:sldChg chg="addSp delSp modSp add mod">
-        <pc:chgData name="Xin Luo" userId="82312ee5779919a4" providerId="LiveId" clId="{65A98D7F-B1DF-E542-A17B-8F6E9ADA57A5}" dt="2025-05-26T12:13:57.826" v="739" actId="1076"/>
-        <pc:sldMkLst>
-          <pc:docMk/>
-          <pc:sldMk cId="3685202054" sldId="2782"/>
-        </pc:sldMkLst>
-        <pc:spChg chg="add del mod">
-          <ac:chgData name="Xin Luo" userId="82312ee5779919a4" providerId="LiveId" clId="{65A98D7F-B1DF-E542-A17B-8F6E9ADA57A5}" dt="2025-05-26T12:13:38.426" v="734" actId="20577"/>
-          <ac:spMkLst>
-            <pc:docMk/>
-            <pc:sldMk cId="3685202054" sldId="2782"/>
-            <ac:spMk id="17" creationId="{FA69F8FF-6AFC-5736-6D4D-D1E93D670F0D}"/>
-          </ac:spMkLst>
-        </pc:spChg>
-        <pc:graphicFrameChg chg="add mod modGraphic">
-          <ac:chgData name="Xin Luo" userId="82312ee5779919a4" providerId="LiveId" clId="{65A98D7F-B1DF-E542-A17B-8F6E9ADA57A5}" dt="2025-05-26T12:13:57.826" v="739" actId="1076"/>
-          <ac:graphicFrameMkLst>
-            <pc:docMk/>
-            <pc:sldMk cId="3685202054" sldId="2782"/>
-            <ac:graphicFrameMk id="5" creationId="{E6AA0987-03CC-82EC-1A0C-777A01D1D22B}"/>
-          </ac:graphicFrameMkLst>
-        </pc:graphicFrameChg>
-      </pc:sldChg>
-      <pc:sldChg chg="addSp delSp modSp add mod">
-        <pc:chgData name="Xin Luo" userId="82312ee5779919a4" providerId="LiveId" clId="{65A98D7F-B1DF-E542-A17B-8F6E9ADA57A5}" dt="2025-05-26T12:48:39.461" v="1020" actId="1076"/>
-        <pc:sldMkLst>
-          <pc:docMk/>
-          <pc:sldMk cId="3950804864" sldId="2783"/>
-        </pc:sldMkLst>
-      </pc:sldChg>
-      <pc:sldChg chg="addSp delSp modSp add mod ord">
-        <pc:chgData name="Xin Luo" userId="82312ee5779919a4" providerId="LiveId" clId="{65A98D7F-B1DF-E542-A17B-8F6E9ADA57A5}" dt="2025-05-26T13:18:51.704" v="1068" actId="20578"/>
-        <pc:sldMkLst>
-          <pc:docMk/>
-          <pc:sldMk cId="1837514754" sldId="2784"/>
-        </pc:sldMkLst>
-      </pc:sldChg>
-    </pc:docChg>
-  </pc:docChgLst>
-  <pc:docChgLst>
-    <pc:chgData name="Xin Luo" userId="82312ee5779919a4" providerId="LiveId" clId="{1FEF9892-859B-8349-A234-8660AFCBAD3E}"/>
-    <pc:docChg chg="undo custSel addSld delSld modSld sldOrd">
-      <pc:chgData name="Xin Luo" userId="82312ee5779919a4" providerId="LiveId" clId="{1FEF9892-859B-8349-A234-8660AFCBAD3E}" dt="2025-06-02T14:42:12.892" v="3529" actId="1038"/>
-      <pc:docMkLst>
-        <pc:docMk/>
-      </pc:docMkLst>
-      <pc:sldChg chg="delSp modSp mod">
-        <pc:chgData name="Xin Luo" userId="82312ee5779919a4" providerId="LiveId" clId="{1FEF9892-859B-8349-A234-8660AFCBAD3E}" dt="2025-05-26T05:11:24.521" v="1534" actId="20577"/>
-        <pc:sldMkLst>
-          <pc:docMk/>
-          <pc:sldMk cId="1576120367" sldId="2387"/>
-        </pc:sldMkLst>
-        <pc:spChg chg="mod">
-          <ac:chgData name="Xin Luo" userId="82312ee5779919a4" providerId="LiveId" clId="{1FEF9892-859B-8349-A234-8660AFCBAD3E}" dt="2025-05-26T04:16:34.648" v="815" actId="20577"/>
-          <ac:spMkLst>
-            <pc:docMk/>
-            <pc:sldMk cId="1576120367" sldId="2387"/>
-            <ac:spMk id="8" creationId="{A1A47F6B-723F-B49C-E80C-2FEA85B63F48}"/>
-          </ac:spMkLst>
-        </pc:spChg>
-        <pc:spChg chg="mod">
-          <ac:chgData name="Xin Luo" userId="82312ee5779919a4" providerId="LiveId" clId="{1FEF9892-859B-8349-A234-8660AFCBAD3E}" dt="2025-05-26T05:11:24.521" v="1534" actId="20577"/>
-          <ac:spMkLst>
-            <pc:docMk/>
-            <pc:sldMk cId="1576120367" sldId="2387"/>
-            <ac:spMk id="9" creationId="{DC55642D-BE0F-C66A-D406-AEEB56A4EB02}"/>
-          </ac:spMkLst>
-        </pc:spChg>
-        <pc:spChg chg="mod">
-          <ac:chgData name="Xin Luo" userId="82312ee5779919a4" providerId="LiveId" clId="{1FEF9892-859B-8349-A234-8660AFCBAD3E}" dt="2025-05-26T04:16:32.592" v="811" actId="20577"/>
-          <ac:spMkLst>
-            <pc:docMk/>
-            <pc:sldMk cId="1576120367" sldId="2387"/>
-            <ac:spMk id="13" creationId="{00000000-0000-0000-0000-000000000000}"/>
-          </ac:spMkLst>
-        </pc:spChg>
-        <pc:grpChg chg="mod">
-          <ac:chgData name="Xin Luo" userId="82312ee5779919a4" providerId="LiveId" clId="{1FEF9892-859B-8349-A234-8660AFCBAD3E}" dt="2025-05-26T04:16:27.526" v="799" actId="1076"/>
-          <ac:grpSpMkLst>
-            <pc:docMk/>
-            <pc:sldMk cId="1576120367" sldId="2387"/>
-            <ac:grpSpMk id="3" creationId="{12ED16A1-79B8-7DB1-1CC1-250B051BAD58}"/>
-          </ac:grpSpMkLst>
-        </pc:grpChg>
-        <pc:grpChg chg="mod">
-          <ac:chgData name="Xin Luo" userId="82312ee5779919a4" providerId="LiveId" clId="{1FEF9892-859B-8349-A234-8660AFCBAD3E}" dt="2025-05-26T04:16:27.526" v="799" actId="1076"/>
-          <ac:grpSpMkLst>
-            <pc:docMk/>
-            <pc:sldMk cId="1576120367" sldId="2387"/>
-            <ac:grpSpMk id="7" creationId="{CAD3754E-1D10-E79E-9F70-D3338A6F2938}"/>
-          </ac:grpSpMkLst>
-        </pc:grpChg>
-      </pc:sldChg>
-      <pc:sldChg chg="modSp mod">
-        <pc:chgData name="Xin Luo" userId="82312ee5779919a4" providerId="LiveId" clId="{1FEF9892-859B-8349-A234-8660AFCBAD3E}" dt="2025-05-26T04:16:44.085" v="835" actId="20577"/>
-        <pc:sldMkLst>
-          <pc:docMk/>
-          <pc:sldMk cId="2415901206" sldId="2447"/>
-        </pc:sldMkLst>
-        <pc:spChg chg="mod">
-          <ac:chgData name="Xin Luo" userId="82312ee5779919a4" providerId="LiveId" clId="{1FEF9892-859B-8349-A234-8660AFCBAD3E}" dt="2025-05-26T04:16:44.085" v="835" actId="20577"/>
-          <ac:spMkLst>
-            <pc:docMk/>
-            <pc:sldMk cId="2415901206" sldId="2447"/>
-            <ac:spMk id="7" creationId="{00000000-0000-0000-0000-000000000000}"/>
-          </ac:spMkLst>
-        </pc:spChg>
-      </pc:sldChg>
-      <pc:sldChg chg="del">
-        <pc:chgData name="Xin Luo" userId="82312ee5779919a4" providerId="LiveId" clId="{1FEF9892-859B-8349-A234-8660AFCBAD3E}" dt="2025-05-26T04:17:02.543" v="846" actId="2696"/>
-        <pc:sldMkLst>
-          <pc:docMk/>
-          <pc:sldMk cId="481122590" sldId="2709"/>
-        </pc:sldMkLst>
-      </pc:sldChg>
-      <pc:sldChg chg="addSp modSp mod ord modNotesTx">
-        <pc:chgData name="Xin Luo" userId="82312ee5779919a4" providerId="LiveId" clId="{1FEF9892-859B-8349-A234-8660AFCBAD3E}" dt="2025-06-02T08:36:36.324" v="1903" actId="113"/>
-        <pc:sldMkLst>
-          <pc:docMk/>
-          <pc:sldMk cId="3053350483" sldId="2729"/>
-        </pc:sldMkLst>
-        <pc:spChg chg="mod">
-          <ac:chgData name="Xin Luo" userId="82312ee5779919a4" providerId="LiveId" clId="{1FEF9892-859B-8349-A234-8660AFCBAD3E}" dt="2025-06-02T08:36:36.324" v="1903" actId="113"/>
-          <ac:spMkLst>
-            <pc:docMk/>
-            <pc:sldMk cId="3053350483" sldId="2729"/>
-            <ac:spMk id="2" creationId="{631AADB6-C88A-D817-4683-FC087E4E240F}"/>
-          </ac:spMkLst>
-        </pc:spChg>
-        <pc:spChg chg="mod">
-          <ac:chgData name="Xin Luo" userId="82312ee5779919a4" providerId="LiveId" clId="{1FEF9892-859B-8349-A234-8660AFCBAD3E}" dt="2025-05-26T04:16:51.743" v="844" actId="20577"/>
-          <ac:spMkLst>
-            <pc:docMk/>
-            <pc:sldMk cId="3053350483" sldId="2729"/>
-            <ac:spMk id="3" creationId="{00000000-0000-0000-0000-000000000000}"/>
-          </ac:spMkLst>
-        </pc:spChg>
-        <pc:spChg chg="add mod">
-          <ac:chgData name="Xin Luo" userId="82312ee5779919a4" providerId="LiveId" clId="{1FEF9892-859B-8349-A234-8660AFCBAD3E}" dt="2025-05-26T04:11:06.840" v="797" actId="14100"/>
-          <ac:spMkLst>
-            <pc:docMk/>
-            <pc:sldMk cId="3053350483" sldId="2729"/>
-            <ac:spMk id="4" creationId="{95BC31FD-A8F6-B67C-907D-FDD61B9DC578}"/>
-          </ac:spMkLst>
-        </pc:spChg>
-      </pc:sldChg>
-      <pc:sldChg chg="addSp delSp modSp mod modNotesTx">
-        <pc:chgData name="Xin Luo" userId="82312ee5779919a4" providerId="LiveId" clId="{1FEF9892-859B-8349-A234-8660AFCBAD3E}" dt="2025-06-01T09:24:35.927" v="1553" actId="1076"/>
-        <pc:sldMkLst>
-          <pc:docMk/>
-          <pc:sldMk cId="402523077" sldId="2765"/>
-        </pc:sldMkLst>
-        <pc:spChg chg="mod">
-          <ac:chgData name="Xin Luo" userId="82312ee5779919a4" providerId="LiveId" clId="{1FEF9892-859B-8349-A234-8660AFCBAD3E}" dt="2025-05-26T04:23:06.813" v="895" actId="20577"/>
-          <ac:spMkLst>
-            <pc:docMk/>
-            <pc:sldMk cId="402523077" sldId="2765"/>
-            <ac:spMk id="2" creationId="{631AADB6-C88A-D817-4683-FC087E4E240F}"/>
-          </ac:spMkLst>
-        </pc:spChg>
-        <pc:spChg chg="add mod">
-          <ac:chgData name="Xin Luo" userId="82312ee5779919a4" providerId="LiveId" clId="{1FEF9892-859B-8349-A234-8660AFCBAD3E}" dt="2025-06-01T09:24:35.927" v="1553" actId="1076"/>
-          <ac:spMkLst>
-            <pc:docMk/>
-            <pc:sldMk cId="402523077" sldId="2765"/>
-            <ac:spMk id="4" creationId="{EB15450C-C250-58F3-B049-216E124A13B6}"/>
-          </ac:spMkLst>
-        </pc:spChg>
-        <pc:spChg chg="mod">
-          <ac:chgData name="Xin Luo" userId="82312ee5779919a4" providerId="LiveId" clId="{1FEF9892-859B-8349-A234-8660AFCBAD3E}" dt="2025-05-26T04:31:02.488" v="916" actId="20577"/>
-          <ac:spMkLst>
-            <pc:docMk/>
-            <pc:sldMk cId="402523077" sldId="2765"/>
-            <ac:spMk id="17" creationId="{9E05FFCA-3371-AF5C-381D-71D984055F5A}"/>
-          </ac:spMkLst>
-        </pc:spChg>
-        <pc:picChg chg="add del mod">
-          <ac:chgData name="Xin Luo" userId="82312ee5779919a4" providerId="LiveId" clId="{1FEF9892-859B-8349-A234-8660AFCBAD3E}" dt="2025-06-01T09:24:18.066" v="1544" actId="478"/>
-          <ac:picMkLst>
-            <pc:docMk/>
-            <pc:sldMk cId="402523077" sldId="2765"/>
-            <ac:picMk id="5" creationId="{C68D23B3-4004-4321-4AB8-B988EE24D323}"/>
-          </ac:picMkLst>
-        </pc:picChg>
-        <pc:picChg chg="add mod">
-          <ac:chgData name="Xin Luo" userId="82312ee5779919a4" providerId="LiveId" clId="{1FEF9892-859B-8349-A234-8660AFCBAD3E}" dt="2025-06-01T09:24:32.159" v="1552" actId="1076"/>
-          <ac:picMkLst>
-            <pc:docMk/>
-            <pc:sldMk cId="402523077" sldId="2765"/>
-            <ac:picMk id="7" creationId="{C0ED5274-FEB5-57EA-2B46-59E98FD30571}"/>
-          </ac:picMkLst>
-        </pc:picChg>
-      </pc:sldChg>
-      <pc:sldChg chg="modSp mod">
-        <pc:chgData name="Xin Luo" userId="82312ee5779919a4" providerId="LiveId" clId="{1FEF9892-859B-8349-A234-8660AFCBAD3E}" dt="2025-05-26T04:18:01.063" v="878" actId="20577"/>
-        <pc:sldMkLst>
-          <pc:docMk/>
-          <pc:sldMk cId="2783263808" sldId="2766"/>
-        </pc:sldMkLst>
-      </pc:sldChg>
-      <pc:sldChg chg="addSp delSp modSp mod ord">
-        <pc:chgData name="Xin Luo" userId="82312ee5779919a4" providerId="LiveId" clId="{1FEF9892-859B-8349-A234-8660AFCBAD3E}" dt="2025-06-02T03:42:31.112" v="1791" actId="14100"/>
-        <pc:sldMkLst>
-          <pc:docMk/>
-          <pc:sldMk cId="237633983" sldId="2771"/>
-        </pc:sldMkLst>
-        <pc:spChg chg="mod">
-          <ac:chgData name="Xin Luo" userId="82312ee5779919a4" providerId="LiveId" clId="{1FEF9892-859B-8349-A234-8660AFCBAD3E}" dt="2025-06-02T03:42:31.112" v="1791" actId="14100"/>
-          <ac:spMkLst>
-            <pc:docMk/>
-            <pc:sldMk cId="237633983" sldId="2771"/>
-            <ac:spMk id="21" creationId="{7C734150-3122-D07B-79A7-00F1EEA5232B}"/>
-          </ac:spMkLst>
-        </pc:spChg>
-        <pc:picChg chg="add del mod">
-          <ac:chgData name="Xin Luo" userId="82312ee5779919a4" providerId="LiveId" clId="{1FEF9892-859B-8349-A234-8660AFCBAD3E}" dt="2025-06-02T03:42:07.333" v="1779" actId="478"/>
-          <ac:picMkLst>
-            <pc:docMk/>
-            <pc:sldMk cId="237633983" sldId="2771"/>
-            <ac:picMk id="5" creationId="{D0E04195-14F0-8678-44AC-842BFF137669}"/>
-          </ac:picMkLst>
-        </pc:picChg>
-        <pc:picChg chg="add mod">
-          <ac:chgData name="Xin Luo" userId="82312ee5779919a4" providerId="LiveId" clId="{1FEF9892-859B-8349-A234-8660AFCBAD3E}" dt="2025-06-02T03:42:20.218" v="1787" actId="1076"/>
-          <ac:picMkLst>
-            <pc:docMk/>
-            <pc:sldMk cId="237633983" sldId="2771"/>
-            <ac:picMk id="7" creationId="{C6700AA6-F6F0-A641-6CA9-4D98606590F7}"/>
-          </ac:picMkLst>
-        </pc:picChg>
-        <pc:picChg chg="del">
-          <ac:chgData name="Xin Luo" userId="82312ee5779919a4" providerId="LiveId" clId="{1FEF9892-859B-8349-A234-8660AFCBAD3E}" dt="2025-06-02T03:39:32.527" v="1771" actId="478"/>
-          <ac:picMkLst>
-            <pc:docMk/>
-            <pc:sldMk cId="237633983" sldId="2771"/>
-            <ac:picMk id="16" creationId="{ACE02192-CEE4-A0AB-C719-CFE41BE23C64}"/>
-          </ac:picMkLst>
-        </pc:picChg>
-        <pc:picChg chg="del">
-          <ac:chgData name="Xin Luo" userId="82312ee5779919a4" providerId="LiveId" clId="{1FEF9892-859B-8349-A234-8660AFCBAD3E}" dt="2025-06-02T03:39:33.987" v="1772" actId="478"/>
-          <ac:picMkLst>
-            <pc:docMk/>
-            <pc:sldMk cId="237633983" sldId="2771"/>
-            <ac:picMk id="19" creationId="{0DDCFDEC-87C1-1C21-BA93-5A0AC0ADD695}"/>
-          </ac:picMkLst>
-        </pc:picChg>
-      </pc:sldChg>
-      <pc:sldChg chg="modSp mod">
-        <pc:chgData name="Xin Luo" userId="82312ee5779919a4" providerId="LiveId" clId="{1FEF9892-859B-8349-A234-8660AFCBAD3E}" dt="2025-05-26T05:11:34.420" v="1542" actId="20577"/>
-        <pc:sldMkLst>
-          <pc:docMk/>
-          <pc:sldMk cId="509658219" sldId="2772"/>
-        </pc:sldMkLst>
-        <pc:spChg chg="mod">
-          <ac:chgData name="Xin Luo" userId="82312ee5779919a4" providerId="LiveId" clId="{1FEF9892-859B-8349-A234-8660AFCBAD3E}" dt="2025-05-26T05:11:34.420" v="1542" actId="20577"/>
-          <ac:spMkLst>
-            <pc:docMk/>
-            <pc:sldMk cId="509658219" sldId="2772"/>
-            <ac:spMk id="7" creationId="{4AB04143-9F32-6D14-35CC-1C7DD08763FB}"/>
-          </ac:spMkLst>
-        </pc:spChg>
-      </pc:sldChg>
-      <pc:sldChg chg="addSp delSp modSp add del mod ord">
-        <pc:chgData name="Xin Luo" userId="82312ee5779919a4" providerId="LiveId" clId="{1FEF9892-859B-8349-A234-8660AFCBAD3E}" dt="2025-05-26T04:31:13.510" v="917" actId="2696"/>
-        <pc:sldMkLst>
-          <pc:docMk/>
-          <pc:sldMk cId="763160493" sldId="2773"/>
-        </pc:sldMkLst>
-      </pc:sldChg>
-      <pc:sldChg chg="add del">
-        <pc:chgData name="Xin Luo" userId="82312ee5779919a4" providerId="LiveId" clId="{1FEF9892-859B-8349-A234-8660AFCBAD3E}" dt="2025-05-26T03:34:03.289" v="552" actId="2696"/>
-        <pc:sldMkLst>
-          <pc:docMk/>
-          <pc:sldMk cId="2429211686" sldId="2773"/>
-        </pc:sldMkLst>
-      </pc:sldChg>
-      <pc:sldChg chg="addSp delSp modSp add mod modNotesTx">
-        <pc:chgData name="Xin Luo" userId="82312ee5779919a4" providerId="LiveId" clId="{1FEF9892-859B-8349-A234-8660AFCBAD3E}" dt="2025-06-02T02:54:15.566" v="1770" actId="1076"/>
-        <pc:sldMkLst>
-          <pc:docMk/>
-          <pc:sldMk cId="2354108090" sldId="2774"/>
-        </pc:sldMkLst>
-        <pc:spChg chg="mod">
-          <ac:chgData name="Xin Luo" userId="82312ee5779919a4" providerId="LiveId" clId="{1FEF9892-859B-8349-A234-8660AFCBAD3E}" dt="2025-05-26T04:31:24.136" v="926" actId="20577"/>
-          <ac:spMkLst>
-            <pc:docMk/>
-            <pc:sldMk cId="2354108090" sldId="2774"/>
-            <ac:spMk id="2" creationId="{5FFF81D2-C78A-B88F-2058-A9905917D723}"/>
-          </ac:spMkLst>
-        </pc:spChg>
-        <pc:spChg chg="mod">
-          <ac:chgData name="Xin Luo" userId="82312ee5779919a4" providerId="LiveId" clId="{1FEF9892-859B-8349-A234-8660AFCBAD3E}" dt="2025-06-02T02:52:16.643" v="1746" actId="20577"/>
-          <ac:spMkLst>
-            <pc:docMk/>
-            <pc:sldMk cId="2354108090" sldId="2774"/>
-            <ac:spMk id="17" creationId="{77B5EDB3-4927-243A-416B-356A6F131E50}"/>
-          </ac:spMkLst>
-        </pc:spChg>
-        <pc:picChg chg="add del mod">
-          <ac:chgData name="Xin Luo" userId="82312ee5779919a4" providerId="LiveId" clId="{1FEF9892-859B-8349-A234-8660AFCBAD3E}" dt="2025-06-02T02:51:49.923" v="1709" actId="478"/>
-          <ac:picMkLst>
-            <pc:docMk/>
-            <pc:sldMk cId="2354108090" sldId="2774"/>
-            <ac:picMk id="5" creationId="{3A002189-648E-3F1B-89CD-394CA5BFC905}"/>
-          </ac:picMkLst>
-        </pc:picChg>
-        <pc:picChg chg="add del mod">
-          <ac:chgData name="Xin Luo" userId="82312ee5779919a4" providerId="LiveId" clId="{1FEF9892-859B-8349-A234-8660AFCBAD3E}" dt="2025-06-02T02:40:57.702" v="1701" actId="478"/>
-          <ac:picMkLst>
-            <pc:docMk/>
-            <pc:sldMk cId="2354108090" sldId="2774"/>
-            <ac:picMk id="7" creationId="{8AD51C26-FC68-A223-F01F-0DD197FF46A8}"/>
-          </ac:picMkLst>
-        </pc:picChg>
-        <pc:picChg chg="add mod">
-          <ac:chgData name="Xin Luo" userId="82312ee5779919a4" providerId="LiveId" clId="{1FEF9892-859B-8349-A234-8660AFCBAD3E}" dt="2025-06-02T02:54:07.488" v="1768" actId="1035"/>
-          <ac:picMkLst>
-            <pc:docMk/>
-            <pc:sldMk cId="2354108090" sldId="2774"/>
-            <ac:picMk id="8" creationId="{15F51922-B8A3-D679-CB59-4E540CFACC02}"/>
-          </ac:picMkLst>
-        </pc:picChg>
-        <pc:picChg chg="add del mod">
-          <ac:chgData name="Xin Luo" userId="82312ee5779919a4" providerId="LiveId" clId="{1FEF9892-859B-8349-A234-8660AFCBAD3E}" dt="2025-06-02T02:52:57.797" v="1752" actId="478"/>
-          <ac:picMkLst>
-            <pc:docMk/>
-            <pc:sldMk cId="2354108090" sldId="2774"/>
-            <ac:picMk id="10" creationId="{2D454AA3-27C1-B65B-C8A5-41FBFBAC76D8}"/>
-          </ac:picMkLst>
-        </pc:picChg>
-        <pc:picChg chg="add del mod">
-          <ac:chgData name="Xin Luo" userId="82312ee5779919a4" providerId="LiveId" clId="{1FEF9892-859B-8349-A234-8660AFCBAD3E}" dt="2025-06-02T02:41:00.849" v="1703" actId="478"/>
-          <ac:picMkLst>
-            <pc:docMk/>
-            <pc:sldMk cId="2354108090" sldId="2774"/>
-            <ac:picMk id="11" creationId="{B422374F-67DC-3A4D-5CF2-31089AAF001D}"/>
-          </ac:picMkLst>
-        </pc:picChg>
-        <pc:picChg chg="add del mod">
-          <ac:chgData name="Xin Luo" userId="82312ee5779919a4" providerId="LiveId" clId="{1FEF9892-859B-8349-A234-8660AFCBAD3E}" dt="2025-06-02T02:40:59.656" v="1702" actId="478"/>
-          <ac:picMkLst>
-            <pc:docMk/>
-            <pc:sldMk cId="2354108090" sldId="2774"/>
-            <ac:picMk id="13" creationId="{1445A1C1-47BA-D83B-A0A3-618BF4AAE9DC}"/>
-          </ac:picMkLst>
-        </pc:picChg>
-        <pc:picChg chg="add mod">
-          <ac:chgData name="Xin Luo" userId="82312ee5779919a4" providerId="LiveId" clId="{1FEF9892-859B-8349-A234-8660AFCBAD3E}" dt="2025-06-02T02:54:15.566" v="1770" actId="1076"/>
-          <ac:picMkLst>
-            <pc:docMk/>
-            <pc:sldMk cId="2354108090" sldId="2774"/>
-            <ac:picMk id="14" creationId="{BE9A5578-B570-7D36-6FFD-676B381F9F91}"/>
-          </ac:picMkLst>
-        </pc:picChg>
-      </pc:sldChg>
-      <pc:sldChg chg="addSp delSp modSp add mod">
-        <pc:chgData name="Xin Luo" userId="82312ee5779919a4" providerId="LiveId" clId="{1FEF9892-859B-8349-A234-8660AFCBAD3E}" dt="2025-06-02T02:10:33.598" v="1700" actId="404"/>
-        <pc:sldMkLst>
-          <pc:docMk/>
-          <pc:sldMk cId="3114578072" sldId="2775"/>
-        </pc:sldMkLst>
-        <pc:spChg chg="mod">
-          <ac:chgData name="Xin Luo" userId="82312ee5779919a4" providerId="LiveId" clId="{1FEF9892-859B-8349-A234-8660AFCBAD3E}" dt="2025-05-26T04:54:47.330" v="1442" actId="20577"/>
-          <ac:spMkLst>
-            <pc:docMk/>
-            <pc:sldMk cId="3114578072" sldId="2775"/>
-            <ac:spMk id="17" creationId="{C015485B-A28D-2176-BB43-3FB41EE1B5B5}"/>
-          </ac:spMkLst>
-        </pc:spChg>
-        <pc:graphicFrameChg chg="add mod modGraphic">
-          <ac:chgData name="Xin Luo" userId="82312ee5779919a4" providerId="LiveId" clId="{1FEF9892-859B-8349-A234-8660AFCBAD3E}" dt="2025-06-02T02:10:33.598" v="1700" actId="404"/>
-          <ac:graphicFrameMkLst>
-            <pc:docMk/>
-            <pc:sldMk cId="3114578072" sldId="2775"/>
-            <ac:graphicFrameMk id="4" creationId="{E69B2228-5D11-D4FF-2302-99CC0F85F7E2}"/>
-          </ac:graphicFrameMkLst>
-        </pc:graphicFrameChg>
-      </pc:sldChg>
-      <pc:sldChg chg="addSp delSp modSp mod">
-        <pc:chgData name="Xin Luo" userId="82312ee5779919a4" providerId="LiveId" clId="{1FEF9892-859B-8349-A234-8660AFCBAD3E}" dt="2025-06-02T12:16:00.069" v="3277" actId="14100"/>
-        <pc:sldMkLst>
-          <pc:docMk/>
-          <pc:sldMk cId="609575857" sldId="2776"/>
-        </pc:sldMkLst>
-        <pc:spChg chg="del">
-          <ac:chgData name="Xin Luo" userId="82312ee5779919a4" providerId="LiveId" clId="{1FEF9892-859B-8349-A234-8660AFCBAD3E}" dt="2025-06-02T12:09:30.204" v="3193" actId="478"/>
-          <ac:spMkLst>
-            <pc:docMk/>
-            <pc:sldMk cId="609575857" sldId="2776"/>
-            <ac:spMk id="6" creationId="{28E049AB-B10C-DDBB-39D5-10C29D19D603}"/>
-          </ac:spMkLst>
-        </pc:spChg>
-        <pc:spChg chg="mod">
-          <ac:chgData name="Xin Luo" userId="82312ee5779919a4" providerId="LiveId" clId="{1FEF9892-859B-8349-A234-8660AFCBAD3E}" dt="2025-06-02T12:16:00.069" v="3277" actId="14100"/>
-          <ac:spMkLst>
-            <pc:docMk/>
-            <pc:sldMk cId="609575857" sldId="2776"/>
-            <ac:spMk id="17" creationId="{D41186E3-6A42-7E88-A23F-786D5085803C}"/>
-          </ac:spMkLst>
-        </pc:spChg>
-        <pc:spChg chg="add del mod">
-          <ac:chgData name="Xin Luo" userId="82312ee5779919a4" providerId="LiveId" clId="{1FEF9892-859B-8349-A234-8660AFCBAD3E}" dt="2025-06-02T12:15:16.639" v="3269"/>
-          <ac:spMkLst>
-            <pc:docMk/>
-            <pc:sldMk cId="609575857" sldId="2776"/>
-            <ac:spMk id="25" creationId="{41F4A96D-266A-F6BD-8147-E113D36817E2}"/>
-          </ac:spMkLst>
-        </pc:spChg>
-        <pc:spChg chg="add del mod">
-          <ac:chgData name="Xin Luo" userId="82312ee5779919a4" providerId="LiveId" clId="{1FEF9892-859B-8349-A234-8660AFCBAD3E}" dt="2025-06-02T12:15:16.634" v="3267" actId="478"/>
-          <ac:spMkLst>
-            <pc:docMk/>
-            <pc:sldMk cId="609575857" sldId="2776"/>
-            <ac:spMk id="26" creationId="{6E617D38-BB1A-E098-314F-051BF0C08CFE}"/>
-          </ac:spMkLst>
-        </pc:spChg>
-        <pc:picChg chg="del">
-          <ac:chgData name="Xin Luo" userId="82312ee5779919a4" providerId="LiveId" clId="{1FEF9892-859B-8349-A234-8660AFCBAD3E}" dt="2025-06-02T12:09:28.770" v="3192" actId="478"/>
-          <ac:picMkLst>
-            <pc:docMk/>
-            <pc:sldMk cId="609575857" sldId="2776"/>
-            <ac:picMk id="5" creationId="{3B765DC1-3A62-4BE4-BEA6-B0A61BE54BCD}"/>
-          </ac:picMkLst>
-        </pc:picChg>
-        <pc:picChg chg="add mod">
-          <ac:chgData name="Xin Luo" userId="82312ee5779919a4" providerId="LiveId" clId="{1FEF9892-859B-8349-A234-8660AFCBAD3E}" dt="2025-06-02T12:14:58.115" v="3254" actId="1036"/>
-          <ac:picMkLst>
-            <pc:docMk/>
-            <pc:sldMk cId="609575857" sldId="2776"/>
-            <ac:picMk id="7" creationId="{A26CA70A-945E-7F90-9B40-8A0E62F2CBFB}"/>
-          </ac:picMkLst>
-        </pc:picChg>
-        <pc:picChg chg="add mod">
-          <ac:chgData name="Xin Luo" userId="82312ee5779919a4" providerId="LiveId" clId="{1FEF9892-859B-8349-A234-8660AFCBAD3E}" dt="2025-06-02T12:14:42.812" v="3248" actId="1036"/>
-          <ac:picMkLst>
-            <pc:docMk/>
-            <pc:sldMk cId="609575857" sldId="2776"/>
-            <ac:picMk id="9" creationId="{A617207F-A5B7-57E2-BCFC-9546C09ADD54}"/>
-          </ac:picMkLst>
-        </pc:picChg>
-        <pc:picChg chg="add mod">
-          <ac:chgData name="Xin Luo" userId="82312ee5779919a4" providerId="LiveId" clId="{1FEF9892-859B-8349-A234-8660AFCBAD3E}" dt="2025-06-02T12:14:42.812" v="3248" actId="1036"/>
-          <ac:picMkLst>
-            <pc:docMk/>
-            <pc:sldMk cId="609575857" sldId="2776"/>
-            <ac:picMk id="11" creationId="{8FA5AF93-8C45-AF2A-901E-61CD73AC516F}"/>
-          </ac:picMkLst>
-        </pc:picChg>
-        <pc:picChg chg="add mod">
-          <ac:chgData name="Xin Luo" userId="82312ee5779919a4" providerId="LiveId" clId="{1FEF9892-859B-8349-A234-8660AFCBAD3E}" dt="2025-06-02T12:15:02.072" v="3264" actId="1037"/>
-          <ac:picMkLst>
-            <pc:docMk/>
-            <pc:sldMk cId="609575857" sldId="2776"/>
-            <ac:picMk id="13" creationId="{35854686-DED2-FDCB-AA93-84813612E9D3}"/>
-          </ac:picMkLst>
-        </pc:picChg>
-        <pc:cxnChg chg="add mod">
-          <ac:chgData name="Xin Luo" userId="82312ee5779919a4" providerId="LiveId" clId="{1FEF9892-859B-8349-A234-8660AFCBAD3E}" dt="2025-06-02T12:15:39.350" v="3273" actId="1582"/>
-          <ac:cxnSpMkLst>
-            <pc:docMk/>
-            <pc:sldMk cId="609575857" sldId="2776"/>
-            <ac:cxnSpMk id="15" creationId="{328AA323-2F1B-995E-3FC1-411179B5C056}"/>
-          </ac:cxnSpMkLst>
-        </pc:cxnChg>
-        <pc:cxnChg chg="add mod">
-          <ac:chgData name="Xin Luo" userId="82312ee5779919a4" providerId="LiveId" clId="{1FEF9892-859B-8349-A234-8660AFCBAD3E}" dt="2025-06-02T12:15:39.350" v="3273" actId="1582"/>
-          <ac:cxnSpMkLst>
-            <pc:docMk/>
-            <pc:sldMk cId="609575857" sldId="2776"/>
-            <ac:cxnSpMk id="16" creationId="{4D69AAC9-2804-41C0-615A-09D97C49FB93}"/>
-          </ac:cxnSpMkLst>
-        </pc:cxnChg>
-        <pc:cxnChg chg="add mod">
-          <ac:chgData name="Xin Luo" userId="82312ee5779919a4" providerId="LiveId" clId="{1FEF9892-859B-8349-A234-8660AFCBAD3E}" dt="2025-06-02T12:15:39.350" v="3273" actId="1582"/>
-          <ac:cxnSpMkLst>
-            <pc:docMk/>
-            <pc:sldMk cId="609575857" sldId="2776"/>
-            <ac:cxnSpMk id="20" creationId="{FA6DF9F9-7FC1-E551-1CE0-FF160C41DAFD}"/>
-          </ac:cxnSpMkLst>
-        </pc:cxnChg>
-      </pc:sldChg>
-      <pc:sldChg chg="addSp delSp modSp mod modNotesTx">
-        <pc:chgData name="Xin Luo" userId="82312ee5779919a4" providerId="LiveId" clId="{1FEF9892-859B-8349-A234-8660AFCBAD3E}" dt="2025-06-02T08:59:46.532" v="2434" actId="20577"/>
-        <pc:sldMkLst>
-          <pc:docMk/>
-          <pc:sldMk cId="565877602" sldId="2778"/>
-        </pc:sldMkLst>
-        <pc:spChg chg="add mod">
-          <ac:chgData name="Xin Luo" userId="82312ee5779919a4" providerId="LiveId" clId="{1FEF9892-859B-8349-A234-8660AFCBAD3E}" dt="2025-06-02T08:58:02.685" v="2354" actId="20577"/>
-          <ac:spMkLst>
-            <pc:docMk/>
-            <pc:sldMk cId="565877602" sldId="2778"/>
-            <ac:spMk id="6" creationId="{7631E065-4FB4-943E-19F7-186F95501006}"/>
-          </ac:spMkLst>
-        </pc:spChg>
-        <pc:spChg chg="del mod">
-          <ac:chgData name="Xin Luo" userId="82312ee5779919a4" providerId="LiveId" clId="{1FEF9892-859B-8349-A234-8660AFCBAD3E}" dt="2025-06-02T08:51:29.776" v="2113" actId="478"/>
-          <ac:spMkLst>
-            <pc:docMk/>
-            <pc:sldMk cId="565877602" sldId="2778"/>
-            <ac:spMk id="10" creationId="{F92064D2-ED42-975C-DDA5-FDB5DC8B1E1A}"/>
-          </ac:spMkLst>
-        </pc:spChg>
-        <pc:spChg chg="mod">
-          <ac:chgData name="Xin Luo" userId="82312ee5779919a4" providerId="LiveId" clId="{1FEF9892-859B-8349-A234-8660AFCBAD3E}" dt="2025-06-02T08:57:21.676" v="2339" actId="20577"/>
-          <ac:spMkLst>
-            <pc:docMk/>
-            <pc:sldMk cId="565877602" sldId="2778"/>
-            <ac:spMk id="17" creationId="{B5DE59D0-AAFE-2780-CAA5-DEC512116523}"/>
-          </ac:spMkLst>
-        </pc:spChg>
-        <pc:picChg chg="del">
-          <ac:chgData name="Xin Luo" userId="82312ee5779919a4" providerId="LiveId" clId="{1FEF9892-859B-8349-A234-8660AFCBAD3E}" dt="2025-06-02T08:50:46.649" v="2086" actId="478"/>
-          <ac:picMkLst>
-            <pc:docMk/>
-            <pc:sldMk cId="565877602" sldId="2778"/>
-            <ac:picMk id="5" creationId="{04265197-3184-EEE9-08B4-F7882B198B77}"/>
-          </ac:picMkLst>
-        </pc:picChg>
-        <pc:picChg chg="del">
-          <ac:chgData name="Xin Luo" userId="82312ee5779919a4" providerId="LiveId" clId="{1FEF9892-859B-8349-A234-8660AFCBAD3E}" dt="2025-06-02T08:50:47.208" v="2087" actId="478"/>
-          <ac:picMkLst>
-            <pc:docMk/>
-            <pc:sldMk cId="565877602" sldId="2778"/>
-            <ac:picMk id="15" creationId="{42B6C9F6-E69B-BC3F-C15C-FF4DAD64125B}"/>
-          </ac:picMkLst>
-        </pc:picChg>
-      </pc:sldChg>
-      <pc:sldChg chg="addSp delSp modSp mod modNotesTx">
-        <pc:chgData name="Xin Luo" userId="82312ee5779919a4" providerId="LiveId" clId="{1FEF9892-859B-8349-A234-8660AFCBAD3E}" dt="2025-06-02T11:28:43.380" v="3106" actId="403"/>
-        <pc:sldMkLst>
-          <pc:docMk/>
-          <pc:sldMk cId="1437556396" sldId="2779"/>
-        </pc:sldMkLst>
-        <pc:spChg chg="add mod">
-          <ac:chgData name="Xin Luo" userId="82312ee5779919a4" providerId="LiveId" clId="{1FEF9892-859B-8349-A234-8660AFCBAD3E}" dt="2025-06-02T11:28:40.438" v="3105" actId="1036"/>
-          <ac:spMkLst>
-            <pc:docMk/>
-            <pc:sldMk cId="1437556396" sldId="2779"/>
-            <ac:spMk id="9" creationId="{950A3835-E0AC-6D24-47BB-24064676F100}"/>
-          </ac:spMkLst>
-        </pc:spChg>
-        <pc:spChg chg="add mod">
-          <ac:chgData name="Xin Luo" userId="82312ee5779919a4" providerId="LiveId" clId="{1FEF9892-859B-8349-A234-8660AFCBAD3E}" dt="2025-06-02T11:28:43.380" v="3106" actId="403"/>
-          <ac:spMkLst>
-            <pc:docMk/>
-            <pc:sldMk cId="1437556396" sldId="2779"/>
-            <ac:spMk id="10" creationId="{8BBD0714-DA1D-59FE-3512-443D9E9DB620}"/>
-          </ac:spMkLst>
-        </pc:spChg>
-        <pc:spChg chg="mod topLvl">
-          <ac:chgData name="Xin Luo" userId="82312ee5779919a4" providerId="LiveId" clId="{1FEF9892-859B-8349-A234-8660AFCBAD3E}" dt="2025-06-02T11:28:40.438" v="3105" actId="1036"/>
-          <ac:spMkLst>
-            <pc:docMk/>
-            <pc:sldMk cId="1437556396" sldId="2779"/>
-            <ac:spMk id="11" creationId="{DF4F3646-F9A6-FC11-64F9-561D1222DDBD}"/>
-          </ac:spMkLst>
-        </pc:spChg>
-        <pc:spChg chg="del mod">
-          <ac:chgData name="Xin Luo" userId="82312ee5779919a4" providerId="LiveId" clId="{1FEF9892-859B-8349-A234-8660AFCBAD3E}" dt="2025-06-02T11:23:10.768" v="2859" actId="478"/>
-          <ac:spMkLst>
-            <pc:docMk/>
-            <pc:sldMk cId="1437556396" sldId="2779"/>
-            <ac:spMk id="16" creationId="{8665A537-24C3-3B93-3A9C-533860D3865C}"/>
-          </ac:spMkLst>
-        </pc:spChg>
-        <pc:spChg chg="del mod">
-          <ac:chgData name="Xin Luo" userId="82312ee5779919a4" providerId="LiveId" clId="{1FEF9892-859B-8349-A234-8660AFCBAD3E}" dt="2025-06-02T11:23:56.911" v="2888" actId="478"/>
-          <ac:spMkLst>
-            <pc:docMk/>
-            <pc:sldMk cId="1437556396" sldId="2779"/>
-            <ac:spMk id="17" creationId="{D33C92F5-6DBB-D2A7-9BBA-5FA6FF70E9BA}"/>
-          </ac:spMkLst>
-        </pc:spChg>
-        <pc:spChg chg="add mod">
-          <ac:chgData name="Xin Luo" userId="82312ee5779919a4" providerId="LiveId" clId="{1FEF9892-859B-8349-A234-8660AFCBAD3E}" dt="2025-06-02T11:28:40.438" v="3105" actId="1036"/>
-          <ac:spMkLst>
-            <pc:docMk/>
-            <pc:sldMk cId="1437556396" sldId="2779"/>
-            <ac:spMk id="25" creationId="{F0910F50-BBAD-78FA-C610-66AB02828D08}"/>
-          </ac:spMkLst>
-        </pc:spChg>
-        <pc:spChg chg="add mod">
-          <ac:chgData name="Xin Luo" userId="82312ee5779919a4" providerId="LiveId" clId="{1FEF9892-859B-8349-A234-8660AFCBAD3E}" dt="2025-06-02T11:28:40.438" v="3105" actId="1036"/>
-          <ac:spMkLst>
-            <pc:docMk/>
-            <pc:sldMk cId="1437556396" sldId="2779"/>
-            <ac:spMk id="26" creationId="{69C7838A-37B0-A337-5505-96E788F97258}"/>
-          </ac:spMkLst>
-        </pc:spChg>
-        <pc:grpChg chg="del">
-          <ac:chgData name="Xin Luo" userId="82312ee5779919a4" providerId="LiveId" clId="{1FEF9892-859B-8349-A234-8660AFCBAD3E}" dt="2025-06-02T11:21:35.186" v="2817" actId="478"/>
-          <ac:grpSpMkLst>
-            <pc:docMk/>
-            <pc:sldMk cId="1437556396" sldId="2779"/>
-            <ac:grpSpMk id="12" creationId="{BD88E2D3-5A9B-1A1D-099B-4404AC8E5437}"/>
-          </ac:grpSpMkLst>
-        </pc:grpChg>
-        <pc:picChg chg="del topLvl">
-          <ac:chgData name="Xin Luo" userId="82312ee5779919a4" providerId="LiveId" clId="{1FEF9892-859B-8349-A234-8660AFCBAD3E}" dt="2025-06-02T11:21:35.186" v="2817" actId="478"/>
-          <ac:picMkLst>
-            <pc:docMk/>
-            <pc:sldMk cId="1437556396" sldId="2779"/>
-            <ac:picMk id="5" creationId="{56B781AE-270C-C107-EF4B-F9E3877E690F}"/>
-          </ac:picMkLst>
-        </pc:picChg>
-        <pc:picChg chg="add mod">
-          <ac:chgData name="Xin Luo" userId="82312ee5779919a4" providerId="LiveId" clId="{1FEF9892-859B-8349-A234-8660AFCBAD3E}" dt="2025-06-02T11:28:40.438" v="3105" actId="1036"/>
-          <ac:picMkLst>
-            <pc:docMk/>
-            <pc:sldMk cId="1437556396" sldId="2779"/>
-            <ac:picMk id="6" creationId="{0CC646FA-40AD-D12A-4BEA-BDBA5AC56C9C}"/>
-          </ac:picMkLst>
-        </pc:picChg>
-        <pc:picChg chg="add mod">
-          <ac:chgData name="Xin Luo" userId="82312ee5779919a4" providerId="LiveId" clId="{1FEF9892-859B-8349-A234-8660AFCBAD3E}" dt="2025-06-02T11:28:40.438" v="3105" actId="1036"/>
-          <ac:picMkLst>
-            <pc:docMk/>
-            <pc:sldMk cId="1437556396" sldId="2779"/>
-            <ac:picMk id="8" creationId="{F6028D6F-482B-0150-B4B6-C717089F11B9}"/>
-          </ac:picMkLst>
-        </pc:picChg>
-        <pc:picChg chg="del">
-          <ac:chgData name="Xin Luo" userId="82312ee5779919a4" providerId="LiveId" clId="{1FEF9892-859B-8349-A234-8660AFCBAD3E}" dt="2025-06-02T11:21:36.955" v="2818" actId="478"/>
-          <ac:picMkLst>
-            <pc:docMk/>
-            <pc:sldMk cId="1437556396" sldId="2779"/>
-            <ac:picMk id="14" creationId="{72A0E0EE-0CFB-B8B3-C9B9-88F0A73AC487}"/>
-          </ac:picMkLst>
-        </pc:picChg>
-        <pc:picChg chg="add mod">
-          <ac:chgData name="Xin Luo" userId="82312ee5779919a4" providerId="LiveId" clId="{1FEF9892-859B-8349-A234-8660AFCBAD3E}" dt="2025-06-02T11:27:19.200" v="3065"/>
-          <ac:picMkLst>
-            <pc:docMk/>
-            <pc:sldMk cId="1437556396" sldId="2779"/>
-            <ac:picMk id="15" creationId="{408DF10A-8963-1356-208F-1C6839D493B8}"/>
-          </ac:picMkLst>
-        </pc:picChg>
-        <pc:picChg chg="add mod">
-          <ac:chgData name="Xin Luo" userId="82312ee5779919a4" providerId="LiveId" clId="{1FEF9892-859B-8349-A234-8660AFCBAD3E}" dt="2025-06-02T11:27:19.200" v="3065"/>
-          <ac:picMkLst>
-            <pc:docMk/>
-            <pc:sldMk cId="1437556396" sldId="2779"/>
-            <ac:picMk id="19" creationId="{16A9593B-C106-2177-37D5-87CB915FBD7B}"/>
-          </ac:picMkLst>
-        </pc:picChg>
-        <pc:picChg chg="add mod">
-          <ac:chgData name="Xin Luo" userId="82312ee5779919a4" providerId="LiveId" clId="{1FEF9892-859B-8349-A234-8660AFCBAD3E}" dt="2025-06-02T11:27:24.291" v="3066"/>
-          <ac:picMkLst>
-            <pc:docMk/>
-            <pc:sldMk cId="1437556396" sldId="2779"/>
-            <ac:picMk id="21" creationId="{C704BDF3-FA75-1705-8E56-74A629C2E7B9}"/>
-          </ac:picMkLst>
-        </pc:picChg>
-        <pc:picChg chg="add mod">
-          <ac:chgData name="Xin Luo" userId="82312ee5779919a4" providerId="LiveId" clId="{1FEF9892-859B-8349-A234-8660AFCBAD3E}" dt="2025-06-02T11:27:24.291" v="3066"/>
-          <ac:picMkLst>
-            <pc:docMk/>
-            <pc:sldMk cId="1437556396" sldId="2779"/>
-            <ac:picMk id="23" creationId="{712889E2-C354-6AC4-E6DD-3131B58C0FF2}"/>
-          </ac:picMkLst>
-        </pc:picChg>
-      </pc:sldChg>
-      <pc:sldChg chg="addSp delSp modSp mod">
-        <pc:chgData name="Xin Luo" userId="82312ee5779919a4" providerId="LiveId" clId="{1FEF9892-859B-8349-A234-8660AFCBAD3E}" dt="2025-06-02T05:14:37.718" v="1857" actId="1036"/>
-        <pc:sldMkLst>
-          <pc:docMk/>
-          <pc:sldMk cId="887088617" sldId="2780"/>
-        </pc:sldMkLst>
-        <pc:spChg chg="mod topLvl">
-          <ac:chgData name="Xin Luo" userId="82312ee5779919a4" providerId="LiveId" clId="{1FEF9892-859B-8349-A234-8660AFCBAD3E}" dt="2025-06-02T05:13:40.537" v="1820" actId="14100"/>
-          <ac:spMkLst>
-            <pc:docMk/>
-            <pc:sldMk cId="887088617" sldId="2780"/>
-            <ac:spMk id="8" creationId="{A3B49D21-95F8-7D30-9646-7E736E35A7E1}"/>
-          </ac:spMkLst>
-        </pc:spChg>
-        <pc:spChg chg="mod topLvl">
-          <ac:chgData name="Xin Luo" userId="82312ee5779919a4" providerId="LiveId" clId="{1FEF9892-859B-8349-A234-8660AFCBAD3E}" dt="2025-06-02T05:14:22.881" v="1840" actId="1036"/>
-          <ac:spMkLst>
-            <pc:docMk/>
-            <pc:sldMk cId="887088617" sldId="2780"/>
-            <ac:spMk id="9" creationId="{3B998F88-4368-0CC7-A30F-642B6032054E}"/>
-          </ac:spMkLst>
-        </pc:spChg>
-        <pc:grpChg chg="del">
-          <ac:chgData name="Xin Luo" userId="82312ee5779919a4" providerId="LiveId" clId="{1FEF9892-859B-8349-A234-8660AFCBAD3E}" dt="2025-06-02T05:11:41.538" v="1792" actId="478"/>
-          <ac:grpSpMkLst>
-            <pc:docMk/>
-            <pc:sldMk cId="887088617" sldId="2780"/>
-            <ac:grpSpMk id="12" creationId="{327C8830-280E-6FB3-9ED4-F9B35EAE8B00}"/>
-          </ac:grpSpMkLst>
-        </pc:grpChg>
-        <pc:grpChg chg="del">
-          <ac:chgData name="Xin Luo" userId="82312ee5779919a4" providerId="LiveId" clId="{1FEF9892-859B-8349-A234-8660AFCBAD3E}" dt="2025-06-02T05:12:05.333" v="1801" actId="478"/>
-          <ac:grpSpMkLst>
-            <pc:docMk/>
-            <pc:sldMk cId="887088617" sldId="2780"/>
-            <ac:grpSpMk id="13" creationId="{019F74A3-1C2A-67B8-E2BA-B3D58F482DB1}"/>
-          </ac:grpSpMkLst>
-        </pc:grpChg>
-        <pc:grpChg chg="add mod">
-          <ac:chgData name="Xin Luo" userId="82312ee5779919a4" providerId="LiveId" clId="{1FEF9892-859B-8349-A234-8660AFCBAD3E}" dt="2025-06-02T05:14:37.718" v="1857" actId="1036"/>
-          <ac:grpSpMkLst>
-            <pc:docMk/>
-            <pc:sldMk cId="887088617" sldId="2780"/>
-            <ac:grpSpMk id="16" creationId="{86967C22-530F-E493-507F-E02E545B701B}"/>
-          </ac:grpSpMkLst>
-        </pc:grpChg>
-        <pc:grpChg chg="add">
-          <ac:chgData name="Xin Luo" userId="82312ee5779919a4" providerId="LiveId" clId="{1FEF9892-859B-8349-A234-8660AFCBAD3E}" dt="2025-06-02T05:14:30.561" v="1845" actId="164"/>
-          <ac:grpSpMkLst>
-            <pc:docMk/>
-            <pc:sldMk cId="887088617" sldId="2780"/>
-            <ac:grpSpMk id="18" creationId="{EE1C6E02-6836-8658-36A1-5422D64893D6}"/>
-          </ac:grpSpMkLst>
-        </pc:grpChg>
-        <pc:picChg chg="add mod">
-          <ac:chgData name="Xin Luo" userId="82312ee5779919a4" providerId="LiveId" clId="{1FEF9892-859B-8349-A234-8660AFCBAD3E}" dt="2025-06-02T05:14:24.052" v="1844" actId="1036"/>
-          <ac:picMkLst>
-            <pc:docMk/>
-            <pc:sldMk cId="887088617" sldId="2780"/>
-            <ac:picMk id="5" creationId="{63522BBD-A112-B1DA-5CD0-765BAB885B8C}"/>
-          </ac:picMkLst>
-        </pc:picChg>
-        <pc:picChg chg="del topLvl">
-          <ac:chgData name="Xin Luo" userId="82312ee5779919a4" providerId="LiveId" clId="{1FEF9892-859B-8349-A234-8660AFCBAD3E}" dt="2025-06-02T05:12:05.333" v="1801" actId="478"/>
-          <ac:picMkLst>
-            <pc:docMk/>
-            <pc:sldMk cId="887088617" sldId="2780"/>
-            <ac:picMk id="7" creationId="{F8A85E48-7D59-83AC-69F7-A509D7062FDF}"/>
-          </ac:picMkLst>
-        </pc:picChg>
-        <pc:picChg chg="add del mod">
-          <ac:chgData name="Xin Luo" userId="82312ee5779919a4" providerId="LiveId" clId="{1FEF9892-859B-8349-A234-8660AFCBAD3E}" dt="2025-06-02T05:13:20.343" v="1811" actId="478"/>
-          <ac:picMkLst>
-            <pc:docMk/>
-            <pc:sldMk cId="887088617" sldId="2780"/>
-            <ac:picMk id="10" creationId="{75A7B9BD-BCFE-5B2F-7429-6F1A28FB21FC}"/>
-          </ac:picMkLst>
-        </pc:picChg>
-        <pc:picChg chg="del topLvl">
-          <ac:chgData name="Xin Luo" userId="82312ee5779919a4" providerId="LiveId" clId="{1FEF9892-859B-8349-A234-8660AFCBAD3E}" dt="2025-06-02T05:11:41.538" v="1792" actId="478"/>
-          <ac:picMkLst>
-            <pc:docMk/>
-            <pc:sldMk cId="887088617" sldId="2780"/>
-            <ac:picMk id="11" creationId="{8E23B940-F719-9467-06F7-3F5E066CBDF7}"/>
-          </ac:picMkLst>
-        </pc:picChg>
-        <pc:picChg chg="add mod">
-          <ac:chgData name="Xin Luo" userId="82312ee5779919a4" providerId="LiveId" clId="{1FEF9892-859B-8349-A234-8660AFCBAD3E}" dt="2025-06-02T05:14:34.737" v="1851" actId="1035"/>
-          <ac:picMkLst>
-            <pc:docMk/>
-            <pc:sldMk cId="887088617" sldId="2780"/>
-            <ac:picMk id="15" creationId="{93323036-B0F5-E3E5-7956-A0C0BCF68143}"/>
-          </ac:picMkLst>
-        </pc:picChg>
-      </pc:sldChg>
-      <pc:sldChg chg="addSp delSp modSp mod">
-        <pc:chgData name="Xin Luo" userId="82312ee5779919a4" providerId="LiveId" clId="{1FEF9892-859B-8349-A234-8660AFCBAD3E}" dt="2025-06-02T05:23:55.920" v="1902" actId="255"/>
-        <pc:sldMkLst>
-          <pc:docMk/>
-          <pc:sldMk cId="1421971610" sldId="2781"/>
-        </pc:sldMkLst>
-        <pc:spChg chg="del">
-          <ac:chgData name="Xin Luo" userId="82312ee5779919a4" providerId="LiveId" clId="{1FEF9892-859B-8349-A234-8660AFCBAD3E}" dt="2025-06-02T05:15:19.783" v="1861" actId="478"/>
-          <ac:spMkLst>
-            <pc:docMk/>
-            <pc:sldMk cId="1421971610" sldId="2781"/>
-            <ac:spMk id="16" creationId="{E268E586-37FB-EA9E-7104-E9335DA80D4C}"/>
-          </ac:spMkLst>
-        </pc:spChg>
-        <pc:spChg chg="mod">
-          <ac:chgData name="Xin Luo" userId="82312ee5779919a4" providerId="LiveId" clId="{1FEF9892-859B-8349-A234-8660AFCBAD3E}" dt="2025-06-02T05:23:55.920" v="1902" actId="255"/>
-          <ac:spMkLst>
-            <pc:docMk/>
-            <pc:sldMk cId="1421971610" sldId="2781"/>
-            <ac:spMk id="17" creationId="{338A361A-6523-524F-BE7C-A36079E8C65B}"/>
-          </ac:spMkLst>
-        </pc:spChg>
-        <pc:spChg chg="mod">
-          <ac:chgData name="Xin Luo" userId="82312ee5779919a4" providerId="LiveId" clId="{1FEF9892-859B-8349-A234-8660AFCBAD3E}" dt="2025-06-02T05:23:44.845" v="1901" actId="1036"/>
-          <ac:spMkLst>
-            <pc:docMk/>
-            <pc:sldMk cId="1421971610" sldId="2781"/>
-            <ac:spMk id="18" creationId="{68DC9956-6C26-2EB6-BD0C-5483B6425CE1}"/>
-          </ac:spMkLst>
-        </pc:spChg>
-        <pc:spChg chg="del">
-          <ac:chgData name="Xin Luo" userId="82312ee5779919a4" providerId="LiveId" clId="{1FEF9892-859B-8349-A234-8660AFCBAD3E}" dt="2025-06-02T05:15:19.783" v="1861" actId="478"/>
-          <ac:spMkLst>
-            <pc:docMk/>
-            <pc:sldMk cId="1421971610" sldId="2781"/>
-            <ac:spMk id="21" creationId="{E6DA1D06-C60B-CE6D-F79A-711FBA16CEA2}"/>
-          </ac:spMkLst>
-        </pc:spChg>
-        <pc:picChg chg="add del mod">
-          <ac:chgData name="Xin Luo" userId="82312ee5779919a4" providerId="LiveId" clId="{1FEF9892-859B-8349-A234-8660AFCBAD3E}" dt="2025-06-02T05:16:33.852" v="1876" actId="478"/>
-          <ac:picMkLst>
-            <pc:docMk/>
-            <pc:sldMk cId="1421971610" sldId="2781"/>
-            <ac:picMk id="5" creationId="{23E588C5-3739-20FB-434A-E543F8084C6A}"/>
-          </ac:picMkLst>
-        </pc:picChg>
-        <pc:picChg chg="add del mod">
-          <ac:chgData name="Xin Luo" userId="82312ee5779919a4" providerId="LiveId" clId="{1FEF9892-859B-8349-A234-8660AFCBAD3E}" dt="2025-06-02T05:23:28.664" v="1884" actId="478"/>
-          <ac:picMkLst>
-            <pc:docMk/>
-            <pc:sldMk cId="1421971610" sldId="2781"/>
-            <ac:picMk id="7" creationId="{3E6DF092-DCBD-A83A-8C14-57A3EC8F21EC}"/>
-          </ac:picMkLst>
-        </pc:picChg>
-        <pc:picChg chg="add mod">
-          <ac:chgData name="Xin Luo" userId="82312ee5779919a4" providerId="LiveId" clId="{1FEF9892-859B-8349-A234-8660AFCBAD3E}" dt="2025-06-02T05:23:34.863" v="1889" actId="14100"/>
-          <ac:picMkLst>
-            <pc:docMk/>
-            <pc:sldMk cId="1421971610" sldId="2781"/>
-            <ac:picMk id="9" creationId="{411D5DE2-19DD-90F9-AB29-89479E54A727}"/>
-          </ac:picMkLst>
-        </pc:picChg>
-        <pc:picChg chg="del">
-          <ac:chgData name="Xin Luo" userId="82312ee5779919a4" providerId="LiveId" clId="{1FEF9892-859B-8349-A234-8660AFCBAD3E}" dt="2025-06-02T05:15:16.307" v="1859" actId="478"/>
-          <ac:picMkLst>
-            <pc:docMk/>
-            <pc:sldMk cId="1421971610" sldId="2781"/>
-            <ac:picMk id="10" creationId="{8F166095-AA31-0A97-05F3-BF45B53C965D}"/>
-          </ac:picMkLst>
-        </pc:picChg>
-        <pc:picChg chg="del">
-          <ac:chgData name="Xin Luo" userId="82312ee5779919a4" providerId="LiveId" clId="{1FEF9892-859B-8349-A234-8660AFCBAD3E}" dt="2025-06-02T05:15:15.088" v="1858" actId="478"/>
-          <ac:picMkLst>
-            <pc:docMk/>
-            <pc:sldMk cId="1421971610" sldId="2781"/>
-            <ac:picMk id="15" creationId="{89791BEA-86FB-D968-60B1-A0B6D48905BA}"/>
-          </ac:picMkLst>
-        </pc:picChg>
-        <pc:picChg chg="del">
-          <ac:chgData name="Xin Luo" userId="82312ee5779919a4" providerId="LiveId" clId="{1FEF9892-859B-8349-A234-8660AFCBAD3E}" dt="2025-06-02T05:15:17.539" v="1860" actId="478"/>
-          <ac:picMkLst>
-            <pc:docMk/>
-            <pc:sldMk cId="1421971610" sldId="2781"/>
-            <ac:picMk id="20" creationId="{CAF38DCD-E579-6C59-A573-EB5C7B2470F8}"/>
-          </ac:picMkLst>
-        </pc:picChg>
-      </pc:sldChg>
-      <pc:sldChg chg="delSp del mod">
-        <pc:chgData name="Xin Luo" userId="82312ee5779919a4" providerId="LiveId" clId="{1FEF9892-859B-8349-A234-8660AFCBAD3E}" dt="2025-06-02T08:37:42.027" v="1907" actId="2696"/>
-        <pc:sldMkLst>
-          <pc:docMk/>
-          <pc:sldMk cId="3950804864" sldId="2783"/>
-        </pc:sldMkLst>
-        <pc:spChg chg="del">
-          <ac:chgData name="Xin Luo" userId="82312ee5779919a4" providerId="LiveId" clId="{1FEF9892-859B-8349-A234-8660AFCBAD3E}" dt="2025-06-02T08:37:35.743" v="1906" actId="478"/>
-          <ac:spMkLst>
-            <pc:docMk/>
-            <pc:sldMk cId="3950804864" sldId="2783"/>
-            <ac:spMk id="8" creationId="{C16A595E-70F1-796A-B345-8487FB5EC84A}"/>
-          </ac:spMkLst>
-        </pc:spChg>
-        <pc:picChg chg="del">
-          <ac:chgData name="Xin Luo" userId="82312ee5779919a4" providerId="LiveId" clId="{1FEF9892-859B-8349-A234-8660AFCBAD3E}" dt="2025-06-02T08:37:33.429" v="1905" actId="478"/>
-          <ac:picMkLst>
-            <pc:docMk/>
-            <pc:sldMk cId="3950804864" sldId="2783"/>
-            <ac:picMk id="6" creationId="{30C9C883-D452-8D0E-B3EA-2AF1AC851803}"/>
-          </ac:picMkLst>
-        </pc:picChg>
-      </pc:sldChg>
-      <pc:sldChg chg="addSp delSp modSp mod">
-        <pc:chgData name="Xin Luo" userId="82312ee5779919a4" providerId="LiveId" clId="{1FEF9892-859B-8349-A234-8660AFCBAD3E}" dt="2025-06-02T11:31:54.642" v="3182" actId="20577"/>
-        <pc:sldMkLst>
-          <pc:docMk/>
-          <pc:sldMk cId="1837514754" sldId="2784"/>
-        </pc:sldMkLst>
-        <pc:spChg chg="mod">
-          <ac:chgData name="Xin Luo" userId="82312ee5779919a4" providerId="LiveId" clId="{1FEF9892-859B-8349-A234-8660AFCBAD3E}" dt="2025-06-02T11:31:54.642" v="3182" actId="20577"/>
-          <ac:spMkLst>
-            <pc:docMk/>
-            <pc:sldMk cId="1837514754" sldId="2784"/>
-            <ac:spMk id="2" creationId="{C4529C50-64E8-CA6D-4574-3DCF0791EB50}"/>
-          </ac:spMkLst>
-        </pc:spChg>
-        <pc:spChg chg="add del">
-          <ac:chgData name="Xin Luo" userId="82312ee5779919a4" providerId="LiveId" clId="{1FEF9892-859B-8349-A234-8660AFCBAD3E}" dt="2025-06-02T09:33:24.561" v="2441" actId="22"/>
-          <ac:spMkLst>
-            <pc:docMk/>
-            <pc:sldMk cId="1837514754" sldId="2784"/>
-            <ac:spMk id="5" creationId="{6A14CB63-9E94-5F71-0B06-C253F08ED8F9}"/>
-          </ac:spMkLst>
-        </pc:spChg>
-        <pc:spChg chg="add del mod">
-          <ac:chgData name="Xin Luo" userId="82312ee5779919a4" providerId="LiveId" clId="{1FEF9892-859B-8349-A234-8660AFCBAD3E}" dt="2025-06-02T10:59:23.556" v="2754" actId="478"/>
-          <ac:spMkLst>
-            <pc:docMk/>
-            <pc:sldMk cId="1837514754" sldId="2784"/>
-            <ac:spMk id="11" creationId="{6F387CC4-510A-1DBC-6E46-FB1934B51252}"/>
-          </ac:spMkLst>
-        </pc:spChg>
-        <pc:spChg chg="add del mod topLvl">
-          <ac:chgData name="Xin Luo" userId="82312ee5779919a4" providerId="LiveId" clId="{1FEF9892-859B-8349-A234-8660AFCBAD3E}" dt="2025-06-02T11:31:30.997" v="3152" actId="207"/>
-          <ac:spMkLst>
-            <pc:docMk/>
-            <pc:sldMk cId="1837514754" sldId="2784"/>
-            <ac:spMk id="12" creationId="{25F3FEE0-DC33-4DE7-D83C-C4CBC563C159}"/>
-          </ac:spMkLst>
-        </pc:spChg>
-        <pc:spChg chg="add mod topLvl">
-          <ac:chgData name="Xin Luo" userId="82312ee5779919a4" providerId="LiveId" clId="{1FEF9892-859B-8349-A234-8660AFCBAD3E}" dt="2025-06-02T11:31:30.997" v="3152" actId="207"/>
-          <ac:spMkLst>
-            <pc:docMk/>
-            <pc:sldMk cId="1837514754" sldId="2784"/>
-            <ac:spMk id="13" creationId="{7C32163D-E26F-9DA4-9A2C-C8524850A1F0}"/>
-          </ac:spMkLst>
-        </pc:spChg>
-        <pc:spChg chg="add mod">
-          <ac:chgData name="Xin Luo" userId="82312ee5779919a4" providerId="LiveId" clId="{1FEF9892-859B-8349-A234-8660AFCBAD3E}" dt="2025-06-02T11:31:30.997" v="3152" actId="207"/>
-          <ac:spMkLst>
-            <pc:docMk/>
-            <pc:sldMk cId="1837514754" sldId="2784"/>
-            <ac:spMk id="16" creationId="{8BCF805A-C94E-D4B7-F080-3A8E89BE29CE}"/>
-          </ac:spMkLst>
-        </pc:spChg>
-        <pc:spChg chg="del mod">
-          <ac:chgData name="Xin Luo" userId="82312ee5779919a4" providerId="LiveId" clId="{1FEF9892-859B-8349-A234-8660AFCBAD3E}" dt="2025-06-02T10:50:53.729" v="2699"/>
-          <ac:spMkLst>
-            <pc:docMk/>
-            <pc:sldMk cId="1837514754" sldId="2784"/>
-            <ac:spMk id="17" creationId="{085D469A-8503-A75E-0037-789F00C157A7}"/>
-          </ac:spMkLst>
-        </pc:spChg>
-        <pc:spChg chg="add mod">
-          <ac:chgData name="Xin Luo" userId="82312ee5779919a4" providerId="LiveId" clId="{1FEF9892-859B-8349-A234-8660AFCBAD3E}" dt="2025-06-02T11:31:30.997" v="3152" actId="207"/>
-          <ac:spMkLst>
-            <pc:docMk/>
-            <pc:sldMk cId="1837514754" sldId="2784"/>
-            <ac:spMk id="18" creationId="{199E28FE-2A6E-40FF-4F8A-344036FC9A91}"/>
-          </ac:spMkLst>
-        </pc:spChg>
-        <pc:grpChg chg="add del mod">
-          <ac:chgData name="Xin Luo" userId="82312ee5779919a4" providerId="LiveId" clId="{1FEF9892-859B-8349-A234-8660AFCBAD3E}" dt="2025-06-02T11:29:48.350" v="3119" actId="165"/>
-          <ac:grpSpMkLst>
-            <pc:docMk/>
-            <pc:sldMk cId="1837514754" sldId="2784"/>
-            <ac:grpSpMk id="14" creationId="{55CC0048-91FF-D913-021D-9C307B36F278}"/>
-          </ac:grpSpMkLst>
-        </pc:grpChg>
-        <pc:grpChg chg="add del mod">
-          <ac:chgData name="Xin Luo" userId="82312ee5779919a4" providerId="LiveId" clId="{1FEF9892-859B-8349-A234-8660AFCBAD3E}" dt="2025-06-02T11:29:08.457" v="3109" actId="165"/>
-          <ac:grpSpMkLst>
-            <pc:docMk/>
-            <pc:sldMk cId="1837514754" sldId="2784"/>
-            <ac:grpSpMk id="15" creationId="{0F57CF91-58C3-04B3-0727-56932743C230}"/>
-          </ac:grpSpMkLst>
-        </pc:grpChg>
-        <pc:grpChg chg="add mod">
-          <ac:chgData name="Xin Luo" userId="82312ee5779919a4" providerId="LiveId" clId="{1FEF9892-859B-8349-A234-8660AFCBAD3E}" dt="2025-06-02T11:30:42.305" v="3143" actId="1076"/>
-          <ac:grpSpMkLst>
-            <pc:docMk/>
-            <pc:sldMk cId="1837514754" sldId="2784"/>
-            <ac:grpSpMk id="19" creationId="{D9111FDB-9AC4-4490-9E86-85BF8AC7A5DF}"/>
-          </ac:grpSpMkLst>
-        </pc:grpChg>
-        <pc:grpChg chg="add">
-          <ac:chgData name="Xin Luo" userId="82312ee5779919a4" providerId="LiveId" clId="{1FEF9892-859B-8349-A234-8660AFCBAD3E}" dt="2025-06-02T11:30:19.726" v="3139" actId="164"/>
-          <ac:grpSpMkLst>
-            <pc:docMk/>
-            <pc:sldMk cId="1837514754" sldId="2784"/>
-            <ac:grpSpMk id="20" creationId="{C2418F0D-7108-4C45-52F4-CE6971D5701D}"/>
-          </ac:grpSpMkLst>
-        </pc:grpChg>
-        <pc:picChg chg="del mod">
-          <ac:chgData name="Xin Luo" userId="82312ee5779919a4" providerId="LiveId" clId="{1FEF9892-859B-8349-A234-8660AFCBAD3E}" dt="2025-06-02T10:54:06.954" v="2700" actId="478"/>
-          <ac:picMkLst>
-            <pc:docMk/>
-            <pc:sldMk cId="1837514754" sldId="2784"/>
-            <ac:picMk id="6" creationId="{8EB43DFC-72C2-3362-12AF-0E6A0E6BDB61}"/>
-          </ac:picMkLst>
-        </pc:picChg>
-        <pc:picChg chg="add mod topLvl">
-          <ac:chgData name="Xin Luo" userId="82312ee5779919a4" providerId="LiveId" clId="{1FEF9892-859B-8349-A234-8660AFCBAD3E}" dt="2025-06-02T11:29:08.457" v="3109" actId="165"/>
-          <ac:picMkLst>
-            <pc:docMk/>
-            <pc:sldMk cId="1837514754" sldId="2784"/>
-            <ac:picMk id="8" creationId="{26A93948-F3EE-2B06-86CB-7646DC6A2A98}"/>
-          </ac:picMkLst>
-        </pc:picChg>
-        <pc:picChg chg="add mod topLvl">
-          <ac:chgData name="Xin Luo" userId="82312ee5779919a4" providerId="LiveId" clId="{1FEF9892-859B-8349-A234-8660AFCBAD3E}" dt="2025-06-02T11:29:48.350" v="3119" actId="165"/>
-          <ac:picMkLst>
-            <pc:docMk/>
-            <pc:sldMk cId="1837514754" sldId="2784"/>
-            <ac:picMk id="10" creationId="{FA5011A1-F210-06A1-358A-495F490A031D}"/>
-          </ac:picMkLst>
-        </pc:picChg>
-      </pc:sldChg>
-      <pc:sldChg chg="delSp add del mod">
-        <pc:chgData name="Xin Luo" userId="82312ee5779919a4" providerId="LiveId" clId="{1FEF9892-859B-8349-A234-8660AFCBAD3E}" dt="2025-06-02T08:59:57.246" v="2435" actId="2696"/>
-        <pc:sldMkLst>
-          <pc:docMk/>
-          <pc:sldMk cId="388902715" sldId="2785"/>
-        </pc:sldMkLst>
-        <pc:picChg chg="del">
-          <ac:chgData name="Xin Luo" userId="82312ee5779919a4" providerId="LiveId" clId="{1FEF9892-859B-8349-A234-8660AFCBAD3E}" dt="2025-06-02T08:56:39.764" v="2320" actId="478"/>
-          <ac:picMkLst>
-            <pc:docMk/>
-            <pc:sldMk cId="388902715" sldId="2785"/>
-            <ac:picMk id="6" creationId="{96119EEC-8CEF-507A-768F-D8F7B76D4D82}"/>
-          </ac:picMkLst>
-        </pc:picChg>
-      </pc:sldChg>
-      <pc:sldChg chg="delSp modSp add mod ord">
-        <pc:chgData name="Xin Luo" userId="82312ee5779919a4" providerId="LiveId" clId="{1FEF9892-859B-8349-A234-8660AFCBAD3E}" dt="2025-06-02T08:40:58.757" v="2085" actId="20577"/>
-        <pc:sldMkLst>
-          <pc:docMk/>
-          <pc:sldMk cId="4037787574" sldId="2786"/>
-        </pc:sldMkLst>
-        <pc:spChg chg="del">
-          <ac:chgData name="Xin Luo" userId="82312ee5779919a4" providerId="LiveId" clId="{1FEF9892-859B-8349-A234-8660AFCBAD3E}" dt="2025-06-02T08:37:49.057" v="1910" actId="478"/>
-          <ac:spMkLst>
-            <pc:docMk/>
-            <pc:sldMk cId="4037787574" sldId="2786"/>
-            <ac:spMk id="10" creationId="{401AF7B4-6596-DECA-BA08-8BA23D521E37}"/>
-          </ac:spMkLst>
-        </pc:spChg>
-        <pc:spChg chg="mod">
-          <ac:chgData name="Xin Luo" userId="82312ee5779919a4" providerId="LiveId" clId="{1FEF9892-859B-8349-A234-8660AFCBAD3E}" dt="2025-06-02T08:40:58.757" v="2085" actId="20577"/>
-          <ac:spMkLst>
-            <pc:docMk/>
-            <pc:sldMk cId="4037787574" sldId="2786"/>
-            <ac:spMk id="17" creationId="{256B3729-B4D8-7B17-1C04-B63276D34ADC}"/>
-          </ac:spMkLst>
-        </pc:spChg>
-        <pc:picChg chg="del">
-          <ac:chgData name="Xin Luo" userId="82312ee5779919a4" providerId="LiveId" clId="{1FEF9892-859B-8349-A234-8660AFCBAD3E}" dt="2025-06-02T08:37:47.332" v="1909" actId="478"/>
-          <ac:picMkLst>
-            <pc:docMk/>
-            <pc:sldMk cId="4037787574" sldId="2786"/>
-            <ac:picMk id="5" creationId="{D610798E-7CBB-D3C5-3E82-A964E3CE476E}"/>
-          </ac:picMkLst>
-        </pc:picChg>
-        <pc:picChg chg="del">
-          <ac:chgData name="Xin Luo" userId="82312ee5779919a4" providerId="LiveId" clId="{1FEF9892-859B-8349-A234-8660AFCBAD3E}" dt="2025-06-02T08:37:47.332" v="1909" actId="478"/>
-          <ac:picMkLst>
-            <pc:docMk/>
-            <pc:sldMk cId="4037787574" sldId="2786"/>
-            <ac:picMk id="15" creationId="{2EC3C145-3D75-687F-3E5E-86C78C3BDD7B}"/>
-          </ac:picMkLst>
-        </pc:picChg>
-      </pc:sldChg>
-      <pc:sldChg chg="addSp modSp add mod">
-        <pc:chgData name="Xin Luo" userId="82312ee5779919a4" providerId="LiveId" clId="{1FEF9892-859B-8349-A234-8660AFCBAD3E}" dt="2025-06-02T08:55:22.188" v="2180" actId="1076"/>
-        <pc:sldMkLst>
-          <pc:docMk/>
-          <pc:sldMk cId="911961530" sldId="2787"/>
-        </pc:sldMkLst>
-        <pc:spChg chg="add mod">
-          <ac:chgData name="Xin Luo" userId="82312ee5779919a4" providerId="LiveId" clId="{1FEF9892-859B-8349-A234-8660AFCBAD3E}" dt="2025-06-02T08:55:22.188" v="2180" actId="1076"/>
-          <ac:spMkLst>
-            <pc:docMk/>
-            <pc:sldMk cId="911961530" sldId="2787"/>
-            <ac:spMk id="7" creationId="{B70EA290-7FFA-6E9F-95FB-9B076200931C}"/>
-          </ac:spMkLst>
-        </pc:spChg>
-        <pc:spChg chg="mod">
-          <ac:chgData name="Xin Luo" userId="82312ee5779919a4" providerId="LiveId" clId="{1FEF9892-859B-8349-A234-8660AFCBAD3E}" dt="2025-06-02T08:54:30.748" v="2169" actId="14100"/>
-          <ac:spMkLst>
-            <pc:docMk/>
-            <pc:sldMk cId="911961530" sldId="2787"/>
-            <ac:spMk id="17" creationId="{66685647-A126-4553-F0E4-D13FD8DFE121}"/>
-          </ac:spMkLst>
-        </pc:spChg>
-        <pc:picChg chg="add mod">
-          <ac:chgData name="Xin Luo" userId="82312ee5779919a4" providerId="LiveId" clId="{1FEF9892-859B-8349-A234-8660AFCBAD3E}" dt="2025-06-02T08:54:19.040" v="2161" actId="1036"/>
-          <ac:picMkLst>
-            <pc:docMk/>
-            <pc:sldMk cId="911961530" sldId="2787"/>
-            <ac:picMk id="5" creationId="{936AAC9B-466A-23E8-F60D-14167B20B32F}"/>
-          </ac:picMkLst>
-        </pc:picChg>
-        <pc:picChg chg="add mod">
-          <ac:chgData name="Xin Luo" userId="82312ee5779919a4" providerId="LiveId" clId="{1FEF9892-859B-8349-A234-8660AFCBAD3E}" dt="2025-06-02T08:55:07.725" v="2176" actId="1076"/>
-          <ac:picMkLst>
-            <pc:docMk/>
-            <pc:sldMk cId="911961530" sldId="2787"/>
-            <ac:picMk id="9" creationId="{DCA86D62-CA7F-6B4B-8387-41EBD6CA5E55}"/>
-          </ac:picMkLst>
-        </pc:picChg>
-      </pc:sldChg>
-      <pc:sldChg chg="delSp modSp add mod ord">
-        <pc:chgData name="Xin Luo" userId="82312ee5779919a4" providerId="LiveId" clId="{1FEF9892-859B-8349-A234-8660AFCBAD3E}" dt="2025-06-02T10:50:33.692" v="2675" actId="255"/>
-        <pc:sldMkLst>
-          <pc:docMk/>
-          <pc:sldMk cId="1527329912" sldId="2788"/>
-        </pc:sldMkLst>
-        <pc:spChg chg="mod">
-          <ac:chgData name="Xin Luo" userId="82312ee5779919a4" providerId="LiveId" clId="{1FEF9892-859B-8349-A234-8660AFCBAD3E}" dt="2025-06-02T10:50:33.692" v="2675" actId="255"/>
-          <ac:spMkLst>
-            <pc:docMk/>
-            <pc:sldMk cId="1527329912" sldId="2788"/>
-            <ac:spMk id="17" creationId="{15ED2F73-4E3C-DFCD-C680-AD3B7C95E667}"/>
-          </ac:spMkLst>
-        </pc:spChg>
-        <pc:picChg chg="del">
-          <ac:chgData name="Xin Luo" userId="82312ee5779919a4" providerId="LiveId" clId="{1FEF9892-859B-8349-A234-8660AFCBAD3E}" dt="2025-06-02T10:47:58.561" v="2563" actId="478"/>
-          <ac:picMkLst>
-            <pc:docMk/>
-            <pc:sldMk cId="1527329912" sldId="2788"/>
-            <ac:picMk id="6" creationId="{EF3E143A-0D3D-8FE9-1B09-3DD7CC289621}"/>
-          </ac:picMkLst>
-        </pc:picChg>
-      </pc:sldChg>
-      <pc:sldChg chg="addSp modSp add mod">
-        <pc:chgData name="Xin Luo" userId="82312ee5779919a4" providerId="LiveId" clId="{1FEF9892-859B-8349-A234-8660AFCBAD3E}" dt="2025-06-02T12:09:17.587" v="3190" actId="403"/>
-        <pc:sldMkLst>
-          <pc:docMk/>
-          <pc:sldMk cId="2678007069" sldId="2789"/>
-        </pc:sldMkLst>
-        <pc:spChg chg="mod">
-          <ac:chgData name="Xin Luo" userId="82312ee5779919a4" providerId="LiveId" clId="{1FEF9892-859B-8349-A234-8660AFCBAD3E}" dt="2025-06-02T12:08:53.008" v="3185" actId="1076"/>
-          <ac:spMkLst>
-            <pc:docMk/>
-            <pc:sldMk cId="2678007069" sldId="2789"/>
-            <ac:spMk id="6" creationId="{3ED0327C-4566-3398-A61F-D4CCCC424DC6}"/>
-          </ac:spMkLst>
-        </pc:spChg>
-        <pc:spChg chg="mod">
-          <ac:chgData name="Xin Luo" userId="82312ee5779919a4" providerId="LiveId" clId="{1FEF9892-859B-8349-A234-8660AFCBAD3E}" dt="2025-06-02T12:09:17.587" v="3190" actId="403"/>
-          <ac:spMkLst>
-            <pc:docMk/>
-            <pc:sldMk cId="2678007069" sldId="2789"/>
-            <ac:spMk id="17" creationId="{A5D23D6B-978C-96BD-2B05-F45B865C0996}"/>
-          </ac:spMkLst>
-        </pc:spChg>
-        <pc:grpChg chg="add mod">
-          <ac:chgData name="Xin Luo" userId="82312ee5779919a4" providerId="LiveId" clId="{1FEF9892-859B-8349-A234-8660AFCBAD3E}" dt="2025-06-02T12:09:11.474" v="3189" actId="1076"/>
-          <ac:grpSpMkLst>
-            <pc:docMk/>
-            <pc:sldMk cId="2678007069" sldId="2789"/>
-            <ac:grpSpMk id="4" creationId="{69574C2A-00F8-61BF-9632-11547C901AF7}"/>
-          </ac:grpSpMkLst>
-        </pc:grpChg>
-        <pc:picChg chg="mod">
-          <ac:chgData name="Xin Luo" userId="82312ee5779919a4" providerId="LiveId" clId="{1FEF9892-859B-8349-A234-8660AFCBAD3E}" dt="2025-06-02T12:08:57.029" v="3186" actId="14100"/>
-          <ac:picMkLst>
-            <pc:docMk/>
-            <pc:sldMk cId="2678007069" sldId="2789"/>
-            <ac:picMk id="5" creationId="{CC6D97A4-8627-E7EE-6864-EEC6A5BFA780}"/>
-          </ac:picMkLst>
-        </pc:picChg>
-      </pc:sldChg>
-      <pc:sldChg chg="addSp delSp modSp add mod">
-        <pc:chgData name="Xin Luo" userId="82312ee5779919a4" providerId="LiveId" clId="{1FEF9892-859B-8349-A234-8660AFCBAD3E}" dt="2025-06-02T14:42:12.892" v="3529" actId="1038"/>
-        <pc:sldMkLst>
-          <pc:docMk/>
-          <pc:sldMk cId="3852714107" sldId="2790"/>
-        </pc:sldMkLst>
-        <pc:spChg chg="add mod">
-          <ac:chgData name="Xin Luo" userId="82312ee5779919a4" providerId="LiveId" clId="{1FEF9892-859B-8349-A234-8660AFCBAD3E}" dt="2025-06-02T14:41:07.767" v="3487" actId="1036"/>
-          <ac:spMkLst>
-            <pc:docMk/>
-            <pc:sldMk cId="3852714107" sldId="2790"/>
-            <ac:spMk id="12" creationId="{F0EDBE1B-9BD5-9DF6-6211-59B4AF1334C3}"/>
-          </ac:spMkLst>
-        </pc:spChg>
-        <pc:spChg chg="add mod">
-          <ac:chgData name="Xin Luo" userId="82312ee5779919a4" providerId="LiveId" clId="{1FEF9892-859B-8349-A234-8660AFCBAD3E}" dt="2025-06-02T14:41:21.794" v="3493" actId="1035"/>
-          <ac:spMkLst>
-            <pc:docMk/>
-            <pc:sldMk cId="3852714107" sldId="2790"/>
-            <ac:spMk id="14" creationId="{B5987875-406D-A25F-1A99-14007DE4474B}"/>
-          </ac:spMkLst>
-        </pc:spChg>
-        <pc:spChg chg="mod">
-          <ac:chgData name="Xin Luo" userId="82312ee5779919a4" providerId="LiveId" clId="{1FEF9892-859B-8349-A234-8660AFCBAD3E}" dt="2025-06-02T14:41:59.877" v="3515" actId="20577"/>
-          <ac:spMkLst>
-            <pc:docMk/>
-            <pc:sldMk cId="3852714107" sldId="2790"/>
-            <ac:spMk id="17" creationId="{431DB7F4-445A-E3C2-4460-756136E1B399}"/>
-          </ac:spMkLst>
-        </pc:spChg>
-        <pc:grpChg chg="add mod">
-          <ac:chgData name="Xin Luo" userId="82312ee5779919a4" providerId="LiveId" clId="{1FEF9892-859B-8349-A234-8660AFCBAD3E}" dt="2025-06-02T14:42:12.892" v="3529" actId="1038"/>
-          <ac:grpSpMkLst>
-            <pc:docMk/>
-            <pc:sldMk cId="3852714107" sldId="2790"/>
-            <ac:grpSpMk id="18" creationId="{A01D756D-B50A-E2EE-5A50-CB434326DA5F}"/>
-          </ac:grpSpMkLst>
-        </pc:grpChg>
-        <pc:grpChg chg="add">
-          <ac:chgData name="Xin Luo" userId="82312ee5779919a4" providerId="LiveId" clId="{1FEF9892-859B-8349-A234-8660AFCBAD3E}" dt="2025-06-02T14:41:18.838" v="3489" actId="164"/>
-          <ac:grpSpMkLst>
-            <pc:docMk/>
-            <pc:sldMk cId="3852714107" sldId="2790"/>
-            <ac:grpSpMk id="19" creationId="{B84917E7-2DEC-F7B5-9FBB-AFD9272484D5}"/>
-          </ac:grpSpMkLst>
-        </pc:grpChg>
-        <pc:picChg chg="add del">
-          <ac:chgData name="Xin Luo" userId="82312ee5779919a4" providerId="LiveId" clId="{1FEF9892-859B-8349-A234-8660AFCBAD3E}" dt="2025-06-02T14:36:38.147" v="3281" actId="478"/>
-          <ac:picMkLst>
-            <pc:docMk/>
-            <pc:sldMk cId="3852714107" sldId="2790"/>
-            <ac:picMk id="4" creationId="{30D2DF9A-53B3-42D7-1264-A77E21A5EDF8}"/>
-          </ac:picMkLst>
-        </pc:picChg>
-        <pc:picChg chg="add mod">
-          <ac:chgData name="Xin Luo" userId="82312ee5779919a4" providerId="LiveId" clId="{1FEF9892-859B-8349-A234-8660AFCBAD3E}" dt="2025-06-02T14:41:07.767" v="3487" actId="1036"/>
-          <ac:picMkLst>
-            <pc:docMk/>
-            <pc:sldMk cId="3852714107" sldId="2790"/>
-            <ac:picMk id="6" creationId="{6612EADE-3049-D10A-6BA3-1C769218C152}"/>
-          </ac:picMkLst>
-        </pc:picChg>
-        <pc:picChg chg="del">
-          <ac:chgData name="Xin Luo" userId="82312ee5779919a4" providerId="LiveId" clId="{1FEF9892-859B-8349-A234-8660AFCBAD3E}" dt="2025-06-02T14:36:36.664" v="3279" actId="478"/>
-          <ac:picMkLst>
-            <pc:docMk/>
-            <pc:sldMk cId="3852714107" sldId="2790"/>
-            <ac:picMk id="7" creationId="{F7E846EB-24E5-3657-F011-4AAA7C79BB75}"/>
-          </ac:picMkLst>
-        </pc:picChg>
-        <pc:picChg chg="del">
-          <ac:chgData name="Xin Luo" userId="82312ee5779919a4" providerId="LiveId" clId="{1FEF9892-859B-8349-A234-8660AFCBAD3E}" dt="2025-06-02T14:36:36.664" v="3279" actId="478"/>
-          <ac:picMkLst>
-            <pc:docMk/>
-            <pc:sldMk cId="3852714107" sldId="2790"/>
-            <ac:picMk id="9" creationId="{41FFC547-70E1-FA65-B468-1F31B5CBB521}"/>
-          </ac:picMkLst>
-        </pc:picChg>
-        <pc:picChg chg="add mod">
-          <ac:chgData name="Xin Luo" userId="82312ee5779919a4" providerId="LiveId" clId="{1FEF9892-859B-8349-A234-8660AFCBAD3E}" dt="2025-06-02T14:40:18.917" v="3431" actId="14100"/>
-          <ac:picMkLst>
-            <pc:docMk/>
-            <pc:sldMk cId="3852714107" sldId="2790"/>
-            <ac:picMk id="10" creationId="{C77C8A7E-4D49-5ECA-844F-D01D8F920377}"/>
-          </ac:picMkLst>
-        </pc:picChg>
-        <pc:picChg chg="del">
-          <ac:chgData name="Xin Luo" userId="82312ee5779919a4" providerId="LiveId" clId="{1FEF9892-859B-8349-A234-8660AFCBAD3E}" dt="2025-06-02T14:36:36.664" v="3279" actId="478"/>
-          <ac:picMkLst>
-            <pc:docMk/>
-            <pc:sldMk cId="3852714107" sldId="2790"/>
-            <ac:picMk id="11" creationId="{F27E88E2-81D9-DCB9-28FE-73F03382A106}"/>
-          </ac:picMkLst>
-        </pc:picChg>
-        <pc:picChg chg="del">
-          <ac:chgData name="Xin Luo" userId="82312ee5779919a4" providerId="LiveId" clId="{1FEF9892-859B-8349-A234-8660AFCBAD3E}" dt="2025-06-02T14:36:36.664" v="3279" actId="478"/>
-          <ac:picMkLst>
-            <pc:docMk/>
-            <pc:sldMk cId="3852714107" sldId="2790"/>
-            <ac:picMk id="13" creationId="{82DB79FE-EBF9-FD9F-73CA-B783A66B9522}"/>
-          </ac:picMkLst>
-        </pc:picChg>
-        <pc:cxnChg chg="del mod">
-          <ac:chgData name="Xin Luo" userId="82312ee5779919a4" providerId="LiveId" clId="{1FEF9892-859B-8349-A234-8660AFCBAD3E}" dt="2025-06-02T14:36:36.664" v="3279" actId="478"/>
-          <ac:cxnSpMkLst>
-            <pc:docMk/>
-            <pc:sldMk cId="3852714107" sldId="2790"/>
-            <ac:cxnSpMk id="15" creationId="{48A28B88-DC12-E092-3611-E7A006A033D0}"/>
-          </ac:cxnSpMkLst>
-        </pc:cxnChg>
-        <pc:cxnChg chg="del mod">
-          <ac:chgData name="Xin Luo" userId="82312ee5779919a4" providerId="LiveId" clId="{1FEF9892-859B-8349-A234-8660AFCBAD3E}" dt="2025-06-02T14:36:36.664" v="3279" actId="478"/>
-          <ac:cxnSpMkLst>
-            <pc:docMk/>
-            <pc:sldMk cId="3852714107" sldId="2790"/>
-            <ac:cxnSpMk id="16" creationId="{02AAA44C-8A85-A2D8-A7B5-058166CB20B9}"/>
-          </ac:cxnSpMkLst>
-        </pc:cxnChg>
-        <pc:cxnChg chg="del mod">
-          <ac:chgData name="Xin Luo" userId="82312ee5779919a4" providerId="LiveId" clId="{1FEF9892-859B-8349-A234-8660AFCBAD3E}" dt="2025-06-02T14:36:36.664" v="3279" actId="478"/>
-          <ac:cxnSpMkLst>
-            <pc:docMk/>
-            <pc:sldMk cId="3852714107" sldId="2790"/>
-            <ac:cxnSpMk id="20" creationId="{92573D6D-C80B-6D81-EBB5-6743DBA7A57C}"/>
-          </ac:cxnSpMkLst>
-        </pc:cxnChg>
-      </pc:sldChg>
-    </pc:docChg>
-  </pc:docChgLst>
-  <pc:docChgLst>
-    <pc:chgData name="Xin Luo" userId="82312ee5779919a4" providerId="LiveId" clId="{F4CA7D5A-CB70-3041-A42E-B88F0AF724FB}"/>
-    <pc:docChg chg="addSld modSld">
-      <pc:chgData name="Xin Luo" userId="82312ee5779919a4" providerId="LiveId" clId="{F4CA7D5A-CB70-3041-A42E-B88F0AF724FB}" dt="2025-05-08T15:42:12.705" v="196" actId="20577"/>
-      <pc:docMkLst>
-        <pc:docMk/>
-      </pc:docMkLst>
-      <pc:sldChg chg="addSp modSp mod">
-        <pc:chgData name="Xin Luo" userId="82312ee5779919a4" providerId="LiveId" clId="{F4CA7D5A-CB70-3041-A42E-B88F0AF724FB}" dt="2025-05-08T15:41:03.323" v="110" actId="1035"/>
-        <pc:sldMkLst>
-          <pc:docMk/>
-          <pc:sldMk cId="1576120367" sldId="2387"/>
-        </pc:sldMkLst>
-        <pc:spChg chg="mod">
-          <ac:chgData name="Xin Luo" userId="82312ee5779919a4" providerId="LiveId" clId="{F4CA7D5A-CB70-3041-A42E-B88F0AF724FB}" dt="2025-05-08T15:40:55.337" v="104" actId="20577"/>
-          <ac:spMkLst>
-            <pc:docMk/>
-            <pc:sldMk cId="1576120367" sldId="2387"/>
-            <ac:spMk id="8" creationId="{A1A47F6B-723F-B49C-E80C-2FEA85B63F48}"/>
-          </ac:spMkLst>
-        </pc:spChg>
-        <pc:spChg chg="mod">
-          <ac:chgData name="Xin Luo" userId="82312ee5779919a4" providerId="LiveId" clId="{F4CA7D5A-CB70-3041-A42E-B88F0AF724FB}" dt="2025-05-08T15:40:45.455" v="98" actId="20577"/>
-          <ac:spMkLst>
-            <pc:docMk/>
-            <pc:sldMk cId="1576120367" sldId="2387"/>
-            <ac:spMk id="9" creationId="{DC55642D-BE0F-C66A-D406-AEEB56A4EB02}"/>
-          </ac:spMkLst>
-        </pc:spChg>
-        <pc:spChg chg="mod">
-          <ac:chgData name="Xin Luo" userId="82312ee5779919a4" providerId="LiveId" clId="{F4CA7D5A-CB70-3041-A42E-B88F0AF724FB}" dt="2025-05-08T15:40:28.374" v="79" actId="20577"/>
-          <ac:spMkLst>
-            <pc:docMk/>
-            <pc:sldMk cId="1576120367" sldId="2387"/>
-            <ac:spMk id="14" creationId="{00000000-0000-0000-0000-000000000000}"/>
-          </ac:spMkLst>
-        </pc:spChg>
-        <pc:grpChg chg="mod">
-          <ac:chgData name="Xin Luo" userId="82312ee5779919a4" providerId="LiveId" clId="{F4CA7D5A-CB70-3041-A42E-B88F0AF724FB}" dt="2025-05-08T15:41:03.323" v="110" actId="1035"/>
-          <ac:grpSpMkLst>
-            <pc:docMk/>
-            <pc:sldMk cId="1576120367" sldId="2387"/>
-            <ac:grpSpMk id="3" creationId="{12ED16A1-79B8-7DB1-1CC1-250B051BAD58}"/>
-          </ac:grpSpMkLst>
-        </pc:grpChg>
-        <pc:grpChg chg="add mod">
-          <ac:chgData name="Xin Luo" userId="82312ee5779919a4" providerId="LiveId" clId="{F4CA7D5A-CB70-3041-A42E-B88F0AF724FB}" dt="2025-05-08T15:41:00.499" v="107" actId="1038"/>
-          <ac:grpSpMkLst>
-            <pc:docMk/>
-            <pc:sldMk cId="1576120367" sldId="2387"/>
-            <ac:grpSpMk id="7" creationId="{CAD3754E-1D10-E79E-9F70-D3338A6F2938}"/>
-          </ac:grpSpMkLst>
-        </pc:grpChg>
-      </pc:sldChg>
-      <pc:sldChg chg="modSp mod">
-        <pc:chgData name="Xin Luo" userId="82312ee5779919a4" providerId="LiveId" clId="{F4CA7D5A-CB70-3041-A42E-B88F0AF724FB}" dt="2025-05-08T15:41:13.554" v="138" actId="20577"/>
-        <pc:sldMkLst>
-          <pc:docMk/>
-          <pc:sldMk cId="2415901206" sldId="2447"/>
-        </pc:sldMkLst>
-        <pc:spChg chg="mod">
-          <ac:chgData name="Xin Luo" userId="82312ee5779919a4" providerId="LiveId" clId="{F4CA7D5A-CB70-3041-A42E-B88F0AF724FB}" dt="2025-05-08T15:41:13.554" v="138" actId="20577"/>
-          <ac:spMkLst>
-            <pc:docMk/>
-            <pc:sldMk cId="2415901206" sldId="2447"/>
-            <ac:spMk id="7" creationId="{00000000-0000-0000-0000-000000000000}"/>
-          </ac:spMkLst>
-        </pc:spChg>
-      </pc:sldChg>
-      <pc:sldChg chg="modSp mod">
-        <pc:chgData name="Xin Luo" userId="82312ee5779919a4" providerId="LiveId" clId="{F4CA7D5A-CB70-3041-A42E-B88F0AF724FB}" dt="2025-05-08T15:40:05.866" v="29" actId="20577"/>
-        <pc:sldMkLst>
-          <pc:docMk/>
-          <pc:sldMk cId="1658607177" sldId="2708"/>
-        </pc:sldMkLst>
-        <pc:spChg chg="mod">
-          <ac:chgData name="Xin Luo" userId="82312ee5779919a4" providerId="LiveId" clId="{F4CA7D5A-CB70-3041-A42E-B88F0AF724FB}" dt="2025-05-08T15:39:56.549" v="4" actId="20577"/>
-          <ac:spMkLst>
-            <pc:docMk/>
-            <pc:sldMk cId="1658607177" sldId="2708"/>
-            <ac:spMk id="3" creationId="{E375549C-74EF-2C8F-6432-2C52B803FB1B}"/>
-          </ac:spMkLst>
-        </pc:spChg>
-        <pc:spChg chg="mod">
-          <ac:chgData name="Xin Luo" userId="82312ee5779919a4" providerId="LiveId" clId="{F4CA7D5A-CB70-3041-A42E-B88F0AF724FB}" dt="2025-05-08T15:40:05.866" v="29" actId="20577"/>
-          <ac:spMkLst>
-            <pc:docMk/>
-            <pc:sldMk cId="1658607177" sldId="2708"/>
-            <ac:spMk id="24" creationId="{00000000-0000-0000-0000-000000000000}"/>
-          </ac:spMkLst>
-        </pc:spChg>
-      </pc:sldChg>
-      <pc:sldChg chg="modSp mod">
-        <pc:chgData name="Xin Luo" userId="82312ee5779919a4" providerId="LiveId" clId="{F4CA7D5A-CB70-3041-A42E-B88F0AF724FB}" dt="2025-05-08T15:41:24.491" v="169" actId="20577"/>
-        <pc:sldMkLst>
-          <pc:docMk/>
-          <pc:sldMk cId="481122590" sldId="2709"/>
-        </pc:sldMkLst>
-      </pc:sldChg>
-      <pc:sldChg chg="add">
-        <pc:chgData name="Xin Luo" userId="82312ee5779919a4" providerId="LiveId" clId="{F4CA7D5A-CB70-3041-A42E-B88F0AF724FB}" dt="2025-05-08T15:41:36.435" v="170"/>
-        <pc:sldMkLst>
-          <pc:docMk/>
-          <pc:sldMk cId="402523077" sldId="2765"/>
-        </pc:sldMkLst>
-      </pc:sldChg>
-      <pc:sldChg chg="add">
-        <pc:chgData name="Xin Luo" userId="82312ee5779919a4" providerId="LiveId" clId="{F4CA7D5A-CB70-3041-A42E-B88F0AF724FB}" dt="2025-05-08T15:41:36.435" v="170"/>
-        <pc:sldMkLst>
-          <pc:docMk/>
-          <pc:sldMk cId="2783263808" sldId="2766"/>
-        </pc:sldMkLst>
-      </pc:sldChg>
-      <pc:sldChg chg="add">
-        <pc:chgData name="Xin Luo" userId="82312ee5779919a4" providerId="LiveId" clId="{F4CA7D5A-CB70-3041-A42E-B88F0AF724FB}" dt="2025-05-08T15:41:36.435" v="170"/>
-        <pc:sldMkLst>
-          <pc:docMk/>
-          <pc:sldMk cId="237633983" sldId="2771"/>
-        </pc:sldMkLst>
-      </pc:sldChg>
-      <pc:sldChg chg="modSp add mod">
-        <pc:chgData name="Xin Luo" userId="82312ee5779919a4" providerId="LiveId" clId="{F4CA7D5A-CB70-3041-A42E-B88F0AF724FB}" dt="2025-05-08T15:42:12.705" v="196" actId="20577"/>
-        <pc:sldMkLst>
-          <pc:docMk/>
-          <pc:sldMk cId="509658219" sldId="2772"/>
-        </pc:sldMkLst>
-        <pc:spChg chg="mod">
-          <ac:chgData name="Xin Luo" userId="82312ee5779919a4" providerId="LiveId" clId="{F4CA7D5A-CB70-3041-A42E-B88F0AF724FB}" dt="2025-05-08T15:42:12.705" v="196" actId="20577"/>
-          <ac:spMkLst>
-            <pc:docMk/>
-            <pc:sldMk cId="509658219" sldId="2772"/>
-            <ac:spMk id="7" creationId="{4AB04143-9F32-6D14-35CC-1C7DD08763FB}"/>
+            <pc:sldMk cId="2896619728" sldId="2792"/>
+            <ac:spMk id="6" creationId="{AC655DF2-381B-EF2F-E4B4-B255CD2F72DA}"/>
           </ac:spMkLst>
         </pc:spChg>
       </pc:sldChg>
@@ -19852,16 +18173,13 @@
               </a:rPr>
               <a:t>第六章实验</a:t>
             </a:r>
-            <a:r>
-              <a:rPr lang="en-US" altLang="zh-CN" sz="3600" b="1" dirty="0">
-                <a:solidFill>
-                  <a:srgbClr val="333333"/>
-                </a:solidFill>
-                <a:latin typeface="+mn-ea"/>
-                <a:ea typeface="+mn-ea"/>
-              </a:rPr>
-              <a:t>-1</a:t>
-            </a:r>
+            <a:endParaRPr lang="en-US" altLang="zh-CN" sz="3600" b="1" dirty="0">
+              <a:solidFill>
+                <a:srgbClr val="333333"/>
+              </a:solidFill>
+              <a:latin typeface="+mn-ea"/>
+              <a:ea typeface="+mn-ea"/>
+            </a:endParaRPr>
           </a:p>
         </p:txBody>
       </p:sp>
@@ -19880,7 +18198,7 @@
         <p:spPr>
           <a:xfrm>
             <a:off x="410818" y="1537249"/>
-            <a:ext cx="11226012" cy="4971169"/>
+            <a:ext cx="11226012" cy="4401205"/>
           </a:xfrm>
           <a:prstGeom prst="rect">
             <a:avLst/>
@@ -19993,11 +18311,7 @@
             </a:endParaRPr>
           </a:p>
           <a:p>
-            <a:pPr algn="just">
-              <a:lnSpc>
-                <a:spcPct val="150000"/>
-              </a:lnSpc>
-            </a:pPr>
+            <a:pPr algn="l"/>
             <a:r>
               <a:rPr lang="zh-CN" altLang="en-US" sz="2800" dirty="0">
                 <a:solidFill>
@@ -20010,7 +18324,7 @@
               <a:t>（</a:t>
             </a:r>
             <a:r>
-              <a:rPr lang="en-US" altLang="zh-CN" sz="2800" dirty="0">
+              <a:rPr lang="en-US" sz="2800" dirty="0">
                 <a:solidFill>
                   <a:schemeClr val="bg2"/>
                 </a:solidFill>
@@ -20029,31 +18343,9 @@
                 <a:ea typeface="+mn-ea"/>
                 <a:cs typeface="Times New Roman" panose="02020603050405020304" pitchFamily="18" charset="0"/>
               </a:rPr>
-              <a:t>）学习类与实例的创建、以及类实例函数、类函数、属性函数的创建与使用课程代码（</a:t>
-            </a:r>
-            <a:r>
-              <a:rPr lang="en-US" altLang="zh-CN" sz="2800" dirty="0">
-                <a:solidFill>
-                  <a:schemeClr val="bg2"/>
-                </a:solidFill>
-                <a:latin typeface="Times New Roman" panose="02020603050405020304" pitchFamily="18" charset="0"/>
-                <a:ea typeface="+mn-ea"/>
-                <a:cs typeface="Times New Roman" panose="02020603050405020304" pitchFamily="18" charset="0"/>
-              </a:rPr>
-              <a:t>1</a:t>
-            </a:r>
-            <a:r>
-              <a:rPr lang="zh-CN" altLang="en-US" sz="2800" dirty="0">
-                <a:solidFill>
-                  <a:schemeClr val="bg2"/>
-                </a:solidFill>
-                <a:latin typeface="Times New Roman" panose="02020603050405020304" pitchFamily="18" charset="0"/>
-                <a:ea typeface="+mn-ea"/>
-                <a:cs typeface="Times New Roman" panose="02020603050405020304" pitchFamily="18" charset="0"/>
-              </a:rPr>
-              <a:t>学时）。</a:t>
-            </a:r>
-            <a:endParaRPr lang="en-US" altLang="zh-CN" sz="2800" dirty="0">
+              <a:t>）类与实例的创建代码实现，包含类函数，实例函数，属性函数的创建等。</a:t>
+            </a:r>
+            <a:endParaRPr lang="en-CN" sz="2800" dirty="0">
               <a:solidFill>
                 <a:schemeClr val="bg2"/>
               </a:solidFill>
@@ -20063,11 +18355,7 @@
             </a:endParaRPr>
           </a:p>
           <a:p>
-            <a:pPr algn="just">
-              <a:lnSpc>
-                <a:spcPct val="150000"/>
-              </a:lnSpc>
-            </a:pPr>
+            <a:pPr algn="l"/>
             <a:r>
               <a:rPr lang="zh-CN" altLang="en-US" sz="2800" dirty="0">
                 <a:solidFill>
@@ -20080,7 +18368,7 @@
               <a:t>（</a:t>
             </a:r>
             <a:r>
-              <a:rPr lang="en-US" altLang="zh-CN" sz="2800" dirty="0">
+              <a:rPr lang="en-US" sz="2800" dirty="0">
                 <a:solidFill>
                   <a:schemeClr val="bg2"/>
                 </a:solidFill>
@@ -20099,31 +18387,9 @@
                 <a:ea typeface="+mn-ea"/>
                 <a:cs typeface="Times New Roman" panose="02020603050405020304" pitchFamily="18" charset="0"/>
               </a:rPr>
-              <a:t>）学习类的继承，类方法重写，抽象类的使用课程代码（</a:t>
-            </a:r>
-            <a:r>
-              <a:rPr lang="en-US" altLang="zh-CN" sz="2800" dirty="0">
-                <a:solidFill>
-                  <a:schemeClr val="bg2"/>
-                </a:solidFill>
-                <a:latin typeface="Times New Roman" panose="02020603050405020304" pitchFamily="18" charset="0"/>
-                <a:ea typeface="+mn-ea"/>
-                <a:cs typeface="Times New Roman" panose="02020603050405020304" pitchFamily="18" charset="0"/>
-              </a:rPr>
-              <a:t>1</a:t>
-            </a:r>
-            <a:r>
-              <a:rPr lang="zh-CN" altLang="en-US" sz="2800" dirty="0">
-                <a:solidFill>
-                  <a:schemeClr val="bg2"/>
-                </a:solidFill>
-                <a:latin typeface="Times New Roman" panose="02020603050405020304" pitchFamily="18" charset="0"/>
-                <a:ea typeface="+mn-ea"/>
-                <a:cs typeface="Times New Roman" panose="02020603050405020304" pitchFamily="18" charset="0"/>
-              </a:rPr>
-              <a:t>学时）。</a:t>
-            </a:r>
-            <a:endParaRPr lang="en-US" altLang="zh-CN" sz="2800" dirty="0">
+              <a:t>）类的继承，类方法重写代码实现。</a:t>
+            </a:r>
+            <a:endParaRPr lang="en-CN" sz="2800" dirty="0">
               <a:solidFill>
                 <a:schemeClr val="bg2"/>
               </a:solidFill>
@@ -20238,7 +18504,7 @@
         <p:spPr>
           <a:xfrm>
             <a:off x="410818" y="832995"/>
-            <a:ext cx="5042925" cy="825419"/>
+            <a:ext cx="9313753" cy="646331"/>
           </a:xfrm>
           <a:prstGeom prst="rect">
             <a:avLst/>
@@ -20253,7 +18519,7 @@
           <a:p>
             <a:pPr algn="just">
               <a:lnSpc>
-                <a:spcPct val="150000"/>
+                <a:spcPct val="100000"/>
               </a:lnSpc>
             </a:pPr>
             <a:r>
@@ -20264,7 +18530,7 @@
                 <a:latin typeface="+mn-ea"/>
                 <a:ea typeface="+mn-ea"/>
               </a:rPr>
-              <a:t>第六章实验</a:t>
+              <a:t>作业</a:t>
             </a:r>
             <a:r>
               <a:rPr lang="en-US" altLang="zh-CN" sz="3600" b="1" dirty="0">
@@ -20274,8 +18540,35 @@
                 <a:latin typeface="+mn-ea"/>
                 <a:ea typeface="+mn-ea"/>
               </a:rPr>
-              <a:t>-2</a:t>
-            </a:r>
+              <a:t>2</a:t>
+            </a:r>
+            <a:r>
+              <a:rPr lang="zh-CN" altLang="en-US" sz="3600" b="1" dirty="0">
+                <a:solidFill>
+                  <a:srgbClr val="333333"/>
+                </a:solidFill>
+                <a:latin typeface="+mn-ea"/>
+                <a:ea typeface="+mn-ea"/>
+              </a:rPr>
+              <a:t>：面向对象学生成绩管理程序设计</a:t>
+            </a:r>
+            <a:r>
+              <a:rPr lang="en-CN" sz="3600" b="1" dirty="0">
+                <a:solidFill>
+                  <a:srgbClr val="333333"/>
+                </a:solidFill>
+                <a:latin typeface="+mn-ea"/>
+                <a:ea typeface="+mn-ea"/>
+              </a:rPr>
+              <a:t> </a:t>
+            </a:r>
+            <a:endParaRPr lang="en-US" altLang="zh-CN" sz="3600" b="1" dirty="0">
+              <a:solidFill>
+                <a:srgbClr val="333333"/>
+              </a:solidFill>
+              <a:latin typeface="+mn-ea"/>
+              <a:ea typeface="+mn-ea"/>
+            </a:endParaRPr>
           </a:p>
         </p:txBody>
       </p:sp>
@@ -20294,7 +18587,7 @@
         <p:spPr>
           <a:xfrm>
             <a:off x="410818" y="1674409"/>
-            <a:ext cx="11495976" cy="4971169"/>
+            <a:ext cx="11495976" cy="4540217"/>
           </a:xfrm>
           <a:prstGeom prst="rect">
             <a:avLst/>
@@ -20321,7 +18614,7 @@
                 <a:ea typeface="+mn-ea"/>
                 <a:cs typeface="Times New Roman" panose="02020603050405020304" pitchFamily="18" charset="0"/>
               </a:rPr>
-              <a:t>实验目标：</a:t>
+              <a:t>作业内容：</a:t>
             </a:r>
             <a:endParaRPr lang="en-US" altLang="zh-CN" sz="3200" b="1" dirty="0">
               <a:solidFill>
@@ -20333,13 +18626,9 @@
             </a:endParaRPr>
           </a:p>
           <a:p>
-            <a:pPr algn="just">
-              <a:lnSpc>
-                <a:spcPct val="150000"/>
-              </a:lnSpc>
-            </a:pPr>
-            <a:r>
-              <a:rPr lang="zh-CN" altLang="en-US" sz="2800" dirty="0">
+            <a:pPr algn="l"/>
+            <a:r>
+              <a:rPr lang="en-US" sz="2800" dirty="0">
                 <a:solidFill>
                   <a:schemeClr val="bg2"/>
                 </a:solidFill>
@@ -20347,10 +18636,10 @@
                 <a:ea typeface="+mn-ea"/>
                 <a:cs typeface="Times New Roman" panose="02020603050405020304" pitchFamily="18" charset="0"/>
               </a:rPr>
-              <a:t>掌握</a:t>
-            </a:r>
-            <a:r>
-              <a:rPr lang="en-US" altLang="zh-CN" sz="2800" dirty="0">
+              <a:t>1. </a:t>
+            </a:r>
+            <a:r>
+              <a:rPr lang="zh-CN" altLang="en-US" sz="2800" dirty="0">
                 <a:solidFill>
                   <a:schemeClr val="bg2"/>
                 </a:solidFill>
@@ -20358,10 +18647,21 @@
                 <a:ea typeface="+mn-ea"/>
                 <a:cs typeface="Times New Roman" panose="02020603050405020304" pitchFamily="18" charset="0"/>
               </a:rPr>
-              <a:t>Python</a:t>
-            </a:r>
-            <a:r>
-              <a:rPr lang="zh-CN" altLang="en-US" sz="2800" dirty="0">
+              <a:t>开发学生课程管理相关类，包含且不限于作业一中功能。</a:t>
+            </a:r>
+            <a:endParaRPr lang="en-CN" sz="2800" dirty="0">
+              <a:solidFill>
+                <a:schemeClr val="bg2"/>
+              </a:solidFill>
+              <a:latin typeface="Times New Roman" panose="02020603050405020304" pitchFamily="18" charset="0"/>
+              <a:ea typeface="+mn-ea"/>
+              <a:cs typeface="Times New Roman" panose="02020603050405020304" pitchFamily="18" charset="0"/>
+            </a:endParaRPr>
+          </a:p>
+          <a:p>
+            <a:pPr algn="l"/>
+            <a:r>
+              <a:rPr lang="en-US" sz="2800" dirty="0">
                 <a:solidFill>
                   <a:schemeClr val="bg2"/>
                 </a:solidFill>
@@ -20369,9 +18669,53 @@
                 <a:ea typeface="+mn-ea"/>
                 <a:cs typeface="Times New Roman" panose="02020603050405020304" pitchFamily="18" charset="0"/>
               </a:rPr>
-              <a:t>编程面向对象程序设计编程</a:t>
-            </a:r>
-            <a:endParaRPr lang="en-US" altLang="zh-CN" sz="2800" dirty="0">
+              <a:t>2. </a:t>
+            </a:r>
+            <a:r>
+              <a:rPr lang="zh-CN" altLang="en-US" sz="2800" dirty="0">
+                <a:solidFill>
+                  <a:schemeClr val="bg2"/>
+                </a:solidFill>
+                <a:latin typeface="Times New Roman" panose="02020603050405020304" pitchFamily="18" charset="0"/>
+                <a:ea typeface="+mn-ea"/>
+                <a:cs typeface="Times New Roman" panose="02020603050405020304" pitchFamily="18" charset="0"/>
+              </a:rPr>
+              <a:t>通过代码对课程管理类进行演示说明。</a:t>
+            </a:r>
+            <a:endParaRPr lang="en-CN" sz="2800" dirty="0">
+              <a:solidFill>
+                <a:schemeClr val="bg2"/>
+              </a:solidFill>
+              <a:latin typeface="Times New Roman" panose="02020603050405020304" pitchFamily="18" charset="0"/>
+              <a:ea typeface="+mn-ea"/>
+              <a:cs typeface="Times New Roman" panose="02020603050405020304" pitchFamily="18" charset="0"/>
+            </a:endParaRPr>
+          </a:p>
+          <a:p>
+            <a:pPr algn="l"/>
+            <a:r>
+              <a:rPr lang="en-US" sz="2800" dirty="0">
+                <a:solidFill>
+                  <a:schemeClr val="bg2"/>
+                </a:solidFill>
+                <a:latin typeface="Times New Roman" panose="02020603050405020304" pitchFamily="18" charset="0"/>
+                <a:ea typeface="+mn-ea"/>
+                <a:cs typeface="Times New Roman" panose="02020603050405020304" pitchFamily="18" charset="0"/>
+              </a:rPr>
+              <a:t>3. </a:t>
+            </a:r>
+            <a:r>
+              <a:rPr lang="zh-CN" altLang="en-US" sz="2800" dirty="0">
+                <a:solidFill>
+                  <a:schemeClr val="bg2"/>
+                </a:solidFill>
+                <a:latin typeface="Times New Roman" panose="02020603050405020304" pitchFamily="18" charset="0"/>
+                <a:ea typeface="+mn-ea"/>
+                <a:cs typeface="Times New Roman" panose="02020603050405020304" pitchFamily="18" charset="0"/>
+              </a:rPr>
+              <a:t>对比总结面向对象程序设计与面向过程程序设计优劣。</a:t>
+            </a:r>
+            <a:endParaRPr lang="en-US" sz="2800" dirty="0">
               <a:solidFill>
                 <a:schemeClr val="bg2"/>
               </a:solidFill>
@@ -20421,10 +18765,10 @@
                 <a:ea typeface="+mn-ea"/>
                 <a:cs typeface="Times New Roman" panose="02020603050405020304" pitchFamily="18" charset="0"/>
               </a:rPr>
-              <a:t>（</a:t>
-            </a:r>
-            <a:r>
-              <a:rPr lang="en-US" altLang="zh-CN" sz="2800" dirty="0">
+              <a:t>作业以</a:t>
+            </a:r>
+            <a:r>
+              <a:rPr lang="en-US" sz="2800" dirty="0">
                 <a:solidFill>
                   <a:schemeClr val="bg2"/>
                 </a:solidFill>
@@ -20432,7 +18776,7 @@
                 <a:ea typeface="+mn-ea"/>
                 <a:cs typeface="Times New Roman" panose="02020603050405020304" pitchFamily="18" charset="0"/>
               </a:rPr>
-              <a:t>1</a:t>
+              <a:t>pdf</a:t>
             </a:r>
             <a:r>
               <a:rPr lang="zh-CN" altLang="en-US" sz="2800" dirty="0">
@@ -20443,10 +18787,10 @@
                 <a:ea typeface="+mn-ea"/>
                 <a:cs typeface="Times New Roman" panose="02020603050405020304" pitchFamily="18" charset="0"/>
               </a:rPr>
-              <a:t>）设计学生类，要求具有成绩查询功能，计算平均分功能（总体</a:t>
-            </a:r>
-            <a:r>
-              <a:rPr lang="en-US" altLang="zh-CN" sz="2800" dirty="0">
+              <a:t>格式提交，要求格式规范、内容准确且细节充分。</a:t>
+            </a:r>
+            <a:r>
+              <a:rPr lang="en-CN" sz="2800" dirty="0">
                 <a:solidFill>
                   <a:schemeClr val="bg2"/>
                 </a:solidFill>
@@ -20454,88 +18798,7 @@
                 <a:ea typeface="+mn-ea"/>
                 <a:cs typeface="Times New Roman" panose="02020603050405020304" pitchFamily="18" charset="0"/>
               </a:rPr>
-              <a:t>/</a:t>
-            </a:r>
-            <a:r>
-              <a:rPr lang="zh-CN" altLang="en-US" sz="2800" dirty="0">
-                <a:solidFill>
-                  <a:schemeClr val="bg2"/>
-                </a:solidFill>
-                <a:latin typeface="Times New Roman" panose="02020603050405020304" pitchFamily="18" charset="0"/>
-                <a:ea typeface="+mn-ea"/>
-                <a:cs typeface="Times New Roman" panose="02020603050405020304" pitchFamily="18" charset="0"/>
-              </a:rPr>
-              <a:t>学年），计算加权平均分功能（总体</a:t>
-            </a:r>
-            <a:r>
-              <a:rPr lang="en-US" altLang="zh-CN" sz="2800" dirty="0">
-                <a:solidFill>
-                  <a:schemeClr val="bg2"/>
-                </a:solidFill>
-                <a:latin typeface="Times New Roman" panose="02020603050405020304" pitchFamily="18" charset="0"/>
-                <a:ea typeface="+mn-ea"/>
-                <a:cs typeface="Times New Roman" panose="02020603050405020304" pitchFamily="18" charset="0"/>
-              </a:rPr>
-              <a:t>/</a:t>
-            </a:r>
-            <a:r>
-              <a:rPr lang="zh-CN" altLang="en-US" sz="2800" dirty="0">
-                <a:solidFill>
-                  <a:schemeClr val="bg2"/>
-                </a:solidFill>
-                <a:latin typeface="Times New Roman" panose="02020603050405020304" pitchFamily="18" charset="0"/>
-                <a:ea typeface="+mn-ea"/>
-                <a:cs typeface="Times New Roman" panose="02020603050405020304" pitchFamily="18" charset="0"/>
-              </a:rPr>
-              <a:t>学年）；</a:t>
-            </a:r>
-            <a:endParaRPr lang="en-US" altLang="zh-CN" sz="2800" dirty="0">
-              <a:solidFill>
-                <a:schemeClr val="bg2"/>
-              </a:solidFill>
-              <a:latin typeface="Times New Roman" panose="02020603050405020304" pitchFamily="18" charset="0"/>
-              <a:ea typeface="+mn-ea"/>
-              <a:cs typeface="Times New Roman" panose="02020603050405020304" pitchFamily="18" charset="0"/>
-            </a:endParaRPr>
-          </a:p>
-          <a:p>
-            <a:pPr algn="just">
-              <a:lnSpc>
-                <a:spcPct val="150000"/>
-              </a:lnSpc>
-            </a:pPr>
-            <a:r>
-              <a:rPr lang="zh-CN" altLang="en-US" sz="2800" dirty="0">
-                <a:solidFill>
-                  <a:schemeClr val="bg2"/>
-                </a:solidFill>
-                <a:latin typeface="Times New Roman" panose="02020603050405020304" pitchFamily="18" charset="0"/>
-                <a:ea typeface="+mn-ea"/>
-                <a:cs typeface="Times New Roman" panose="02020603050405020304" pitchFamily="18" charset="0"/>
-              </a:rPr>
-              <a:t>（</a:t>
-            </a:r>
-            <a:r>
-              <a:rPr lang="en-US" altLang="zh-CN" sz="2800" dirty="0">
-                <a:solidFill>
-                  <a:schemeClr val="bg2"/>
-                </a:solidFill>
-                <a:latin typeface="Times New Roman" panose="02020603050405020304" pitchFamily="18" charset="0"/>
-                <a:ea typeface="+mn-ea"/>
-                <a:cs typeface="Times New Roman" panose="02020603050405020304" pitchFamily="18" charset="0"/>
-              </a:rPr>
-              <a:t>2</a:t>
-            </a:r>
-            <a:r>
-              <a:rPr lang="zh-CN" altLang="en-US" sz="2800" dirty="0">
-                <a:solidFill>
-                  <a:schemeClr val="bg2"/>
-                </a:solidFill>
-                <a:latin typeface="Times New Roman" panose="02020603050405020304" pitchFamily="18" charset="0"/>
-                <a:ea typeface="+mn-ea"/>
-                <a:cs typeface="Times New Roman" panose="02020603050405020304" pitchFamily="18" charset="0"/>
-              </a:rPr>
-              <a:t>）演示类的创建以及功能使用。</a:t>
+              <a:t> </a:t>
             </a:r>
             <a:endParaRPr lang="en-US" altLang="zh-CN" sz="2800" dirty="0">
               <a:solidFill>
@@ -20586,14 +18849,14 @@
               <a:rPr lang="zh-CN" altLang="en-US" dirty="0">
                 <a:latin typeface="+mn-ea"/>
               </a:rPr>
-              <a:t>三、</a:t>
+              <a:t>六、</a:t>
             </a:r>
             <a:r>
               <a:rPr lang="zh-CN" altLang="en-US" dirty="0">
                 <a:latin typeface="微软雅黑" pitchFamily="34" charset="-122"/>
                 <a:ea typeface="微软雅黑" pitchFamily="34" charset="-122"/>
               </a:rPr>
-              <a:t>函数、类和模块</a:t>
+              <a:t>面向对象程序设计</a:t>
             </a:r>
           </a:p>
         </p:txBody>
